--- a/Для других/Victoria NAtus VIncere est.pptx
+++ b/Для других/Victoria NAtus VIncere est.pptx
@@ -150,7 +150,7 @@
         <p:txBody>
           <a:bodyPr/>
           <a:p>
-            <a:fld id="{9ED0787D-CEB1-49AA-83CD-C0403FF04200}" type="slidenum">
+            <a:fld id="{38D6A04C-1460-42F3-B387-9C6425CC0259}" type="slidenum">
               <a:t>&lt;#&gt;</a:t>
             </a:fld>
           </a:p>
@@ -320,7 +320,7 @@
         <p:txBody>
           <a:bodyPr/>
           <a:p>
-            <a:fld id="{0C782AC8-14BF-458D-8F6D-F6BFE792D40B}" type="slidenum">
+            <a:fld id="{A5AB292B-DF57-4C49-A0E1-338C458AB01F}" type="slidenum">
               <a:t>&lt;#&gt;</a:t>
             </a:fld>
           </a:p>
@@ -556,7 +556,7 @@
                 <a:tab algn="l" pos="0"/>
               </a:tabLst>
             </a:pPr>
-            <a:fld id="{4470E723-6913-4B07-ADBB-3C419117E2DB}" type="slidenum">
+            <a:fld id="{CF09347E-EA31-4C66-B694-7D7966C414BD}" type="slidenum">
               <a:rPr b="0" lang="ru-RU" sz="1400" strike="noStrike" u="none">
                 <a:solidFill>
                   <a:srgbClr val="000000"/>

--- a/Для других/Victoria NAtus VIncere est.pptx
+++ b/Для других/Victoria NAtus VIncere est.pptx
@@ -9,6 +9,8 @@
     <p:sldId id="257" r:id="rId4"/>
     <p:sldId id="258" r:id="rId5"/>
     <p:sldId id="259" r:id="rId6"/>
+    <p:sldId id="260" r:id="rId7"/>
+    <p:sldId id="261" r:id="rId8"/>
   </p:sldIdLst>
   <p:sldSz cx="10080625" cy="5670550"/>
   <p:notesSz cx="7559675" cy="10691813"/>
@@ -18,343 +20,6 @@
 <file path=ppt/slideLayouts/slideLayout1.xml><?xml version="1.0" encoding="utf-8"?>
 <p:sldLayout xmlns:a="http://schemas.openxmlformats.org/drawingml/2006/main" xmlns:p="http://schemas.openxmlformats.org/presentationml/2006/main" xmlns:r="http://schemas.openxmlformats.org/officeDocument/2006/relationships" xmlns:p14="http://schemas.microsoft.com/office/powerpoint/2010/main" xmlns:p15="http://schemas.microsoft.com/office/powerpoint/2012/main" xmlns:mc="http://schemas.openxmlformats.org/markup-compatibility/2006" type="title" preserve="1">
   <p:cSld name="Обычный">
-    <p:spTree>
-      <p:nvGrpSpPr>
-        <p:cNvPr id="1" name=""/>
-        <p:cNvGrpSpPr/>
-        <p:nvPr/>
-      </p:nvGrpSpPr>
-      <p:grpSpPr>
-        <a:xfrm>
-          <a:off x="0" y="0"/>
-          <a:ext cx="0" cy="0"/>
-          <a:chOff x="0" y="0"/>
-          <a:chExt cx="0" cy="0"/>
-        </a:xfrm>
-      </p:grpSpPr>
-      <p:sp>
-        <p:nvSpPr>
-          <p:cNvPr id="7" name="PlaceHolder 1"/>
-          <p:cNvSpPr>
-            <a:spLocks noGrp="1"/>
-          </p:cNvSpPr>
-          <p:nvPr>
-            <p:ph type="title"/>
-          </p:nvPr>
-        </p:nvSpPr>
-        <p:spPr>
-          <a:xfrm>
-            <a:off x="504000" y="73800"/>
-            <a:ext cx="9071280" cy="1250280"/>
-          </a:xfrm>
-          <a:prstGeom prst="rect">
-            <a:avLst/>
-          </a:prstGeom>
-          <a:noFill/>
-          <a:ln w="0">
-            <a:noFill/>
-          </a:ln>
-        </p:spPr>
-        <p:txBody>
-          <a:bodyPr lIns="0" rIns="0" tIns="0" bIns="0" anchor="ctr">
-            <a:spAutoFit/>
-          </a:bodyPr>
-          <a:p>
-            <a:pPr indent="0" algn="ctr">
-              <a:buNone/>
-            </a:pPr>
-            <a:endParaRPr b="0" lang="ru-RU" sz="4400" strike="noStrike" u="none">
-              <a:solidFill>
-                <a:srgbClr val="000000"/>
-              </a:solidFill>
-              <a:effectLst/>
-              <a:uFillTx/>
-              <a:latin typeface="Arial"/>
-            </a:endParaRPr>
-          </a:p>
-        </p:txBody>
-      </p:sp>
-      <p:sp>
-        <p:nvSpPr>
-          <p:cNvPr id="8" name="PlaceHolder 2"/>
-          <p:cNvSpPr>
-            <a:spLocks noGrp="1"/>
-          </p:cNvSpPr>
-          <p:nvPr>
-            <p:ph type="subTitle"/>
-          </p:nvPr>
-        </p:nvSpPr>
-        <p:spPr>
-          <a:xfrm>
-            <a:off x="504000" y="1326600"/>
-            <a:ext cx="9072000" cy="3288600"/>
-          </a:xfrm>
-          <a:prstGeom prst="rect">
-            <a:avLst/>
-          </a:prstGeom>
-          <a:noFill/>
-          <a:ln w="0">
-            <a:noFill/>
-          </a:ln>
-        </p:spPr>
-        <p:txBody>
-          <a:bodyPr lIns="0" rIns="0" tIns="0" bIns="0" anchor="ctr">
-            <a:spAutoFit/>
-          </a:bodyPr>
-          <a:p>
-            <a:pPr indent="0" algn="ctr">
-              <a:buNone/>
-            </a:pPr>
-            <a:endParaRPr b="0" lang="ru-RU" sz="3200" strike="noStrike" u="none">
-              <a:solidFill>
-                <a:srgbClr val="000000"/>
-              </a:solidFill>
-              <a:effectLst/>
-              <a:uFillTx/>
-              <a:latin typeface="Arial"/>
-            </a:endParaRPr>
-          </a:p>
-        </p:txBody>
-      </p:sp>
-      <p:sp>
-        <p:nvSpPr>
-          <p:cNvPr id="4" name="PlaceHolder 3"/>
-          <p:cNvSpPr>
-            <a:spLocks noGrp="1"/>
-          </p:cNvSpPr>
-          <p:nvPr>
-            <p:ph type="ftr" idx="1"/>
-          </p:nvPr>
-        </p:nvSpPr>
-        <p:spPr/>
-        <p:txBody>
-          <a:bodyPr/>
-          <a:p>
-            <a:r>
-              <a:t>Footer</a:t>
-            </a:r>
-          </a:p>
-        </p:txBody>
-      </p:sp>
-      <p:sp>
-        <p:nvSpPr>
-          <p:cNvPr id="5" name="PlaceHolder 4"/>
-          <p:cNvSpPr>
-            <a:spLocks noGrp="1"/>
-          </p:cNvSpPr>
-          <p:nvPr>
-            <p:ph type="sldNum" idx="2"/>
-          </p:nvPr>
-        </p:nvSpPr>
-        <p:spPr/>
-        <p:txBody>
-          <a:bodyPr/>
-          <a:p>
-            <a:fld id="{38D6A04C-1460-42F3-B387-9C6425CC0259}" type="slidenum">
-              <a:t>&lt;#&gt;</a:t>
-            </a:fld>
-          </a:p>
-        </p:txBody>
-      </p:sp>
-      <p:sp>
-        <p:nvSpPr>
-          <p:cNvPr id="6" name="PlaceHolder 5"/>
-          <p:cNvSpPr>
-            <a:spLocks noGrp="1"/>
-          </p:cNvSpPr>
-          <p:nvPr>
-            <p:ph type="dt" idx="3"/>
-          </p:nvPr>
-        </p:nvSpPr>
-        <p:spPr/>
-        <p:txBody>
-          <a:bodyPr/>
-          <a:p>
-            <a:r>
-              <a:rPr lang="ru-RU"/>
-              <a:t/>
-            </a:r>
-          </a:p>
-        </p:txBody>
-      </p:sp>
-    </p:spTree>
-  </p:cSld>
-</p:sldLayout>
-</file>
-
-<file path=ppt/slideLayouts/slideLayout2.xml><?xml version="1.0" encoding="utf-8"?>
-<p:sldLayout xmlns:a="http://schemas.openxmlformats.org/drawingml/2006/main" xmlns:p="http://schemas.openxmlformats.org/presentationml/2006/main" xmlns:r="http://schemas.openxmlformats.org/officeDocument/2006/relationships" xmlns:p14="http://schemas.microsoft.com/office/powerpoint/2010/main" xmlns:p15="http://schemas.microsoft.com/office/powerpoint/2012/main" xmlns:mc="http://schemas.openxmlformats.org/markup-compatibility/2006" type="tx" preserve="1">
-  <p:cSld name="Обычный">
-    <p:spTree>
-      <p:nvGrpSpPr>
-        <p:cNvPr id="1" name=""/>
-        <p:cNvGrpSpPr/>
-        <p:nvPr/>
-      </p:nvGrpSpPr>
-      <p:grpSpPr>
-        <a:xfrm>
-          <a:off x="0" y="0"/>
-          <a:ext cx="0" cy="0"/>
-          <a:chOff x="0" y="0"/>
-          <a:chExt cx="0" cy="0"/>
-        </a:xfrm>
-      </p:grpSpPr>
-      <p:sp>
-        <p:nvSpPr>
-          <p:cNvPr id="9" name="PlaceHolder 1"/>
-          <p:cNvSpPr>
-            <a:spLocks noGrp="1"/>
-          </p:cNvSpPr>
-          <p:nvPr>
-            <p:ph type="title"/>
-          </p:nvPr>
-        </p:nvSpPr>
-        <p:spPr>
-          <a:xfrm>
-            <a:off x="504000" y="73800"/>
-            <a:ext cx="9071280" cy="1250280"/>
-          </a:xfrm>
-          <a:prstGeom prst="rect">
-            <a:avLst/>
-          </a:prstGeom>
-          <a:noFill/>
-          <a:ln w="0">
-            <a:noFill/>
-          </a:ln>
-        </p:spPr>
-        <p:txBody>
-          <a:bodyPr lIns="0" rIns="0" tIns="0" bIns="0" anchor="ctr">
-            <a:spAutoFit/>
-          </a:bodyPr>
-          <a:p>
-            <a:pPr indent="0" algn="ctr">
-              <a:buNone/>
-            </a:pPr>
-            <a:endParaRPr b="0" lang="ru-RU" sz="4400" strike="noStrike" u="none">
-              <a:solidFill>
-                <a:srgbClr val="000000"/>
-              </a:solidFill>
-              <a:effectLst/>
-              <a:uFillTx/>
-              <a:latin typeface="Arial"/>
-            </a:endParaRPr>
-          </a:p>
-        </p:txBody>
-      </p:sp>
-      <p:sp>
-        <p:nvSpPr>
-          <p:cNvPr id="10" name="PlaceHolder 2"/>
-          <p:cNvSpPr>
-            <a:spLocks noGrp="1"/>
-          </p:cNvSpPr>
-          <p:nvPr>
-            <p:ph/>
-          </p:nvPr>
-        </p:nvSpPr>
-        <p:spPr>
-          <a:xfrm>
-            <a:off x="504000" y="1326600"/>
-            <a:ext cx="9072000" cy="3288600"/>
-          </a:xfrm>
-          <a:prstGeom prst="rect">
-            <a:avLst/>
-          </a:prstGeom>
-          <a:noFill/>
-          <a:ln w="0">
-            <a:noFill/>
-          </a:ln>
-        </p:spPr>
-        <p:txBody>
-          <a:bodyPr lIns="0" rIns="0" tIns="0" bIns="0" anchor="t">
-            <a:normAutofit/>
-          </a:bodyPr>
-          <a:p>
-            <a:pPr indent="0">
-              <a:spcBef>
-                <a:spcPts val="1417"/>
-              </a:spcBef>
-              <a:buNone/>
-            </a:pPr>
-            <a:endParaRPr b="0" lang="ru-RU" sz="3200" strike="noStrike" u="none">
-              <a:solidFill>
-                <a:srgbClr val="000000"/>
-              </a:solidFill>
-              <a:effectLst/>
-              <a:uFillTx/>
-              <a:latin typeface="Arial"/>
-            </a:endParaRPr>
-          </a:p>
-        </p:txBody>
-      </p:sp>
-      <p:sp>
-        <p:nvSpPr>
-          <p:cNvPr id="4" name="PlaceHolder 3"/>
-          <p:cNvSpPr>
-            <a:spLocks noGrp="1"/>
-          </p:cNvSpPr>
-          <p:nvPr>
-            <p:ph type="ftr" idx="1"/>
-          </p:nvPr>
-        </p:nvSpPr>
-        <p:spPr/>
-        <p:txBody>
-          <a:bodyPr/>
-          <a:p>
-            <a:r>
-              <a:t>Footer</a:t>
-            </a:r>
-          </a:p>
-        </p:txBody>
-      </p:sp>
-      <p:sp>
-        <p:nvSpPr>
-          <p:cNvPr id="5" name="PlaceHolder 4"/>
-          <p:cNvSpPr>
-            <a:spLocks noGrp="1"/>
-          </p:cNvSpPr>
-          <p:nvPr>
-            <p:ph type="sldNum" idx="2"/>
-          </p:nvPr>
-        </p:nvSpPr>
-        <p:spPr/>
-        <p:txBody>
-          <a:bodyPr/>
-          <a:p>
-            <a:fld id="{A5AB292B-DF57-4C49-A0E1-338C458AB01F}" type="slidenum">
-              <a:t>&lt;#&gt;</a:t>
-            </a:fld>
-          </a:p>
-        </p:txBody>
-      </p:sp>
-      <p:sp>
-        <p:nvSpPr>
-          <p:cNvPr id="6" name="PlaceHolder 5"/>
-          <p:cNvSpPr>
-            <a:spLocks noGrp="1"/>
-          </p:cNvSpPr>
-          <p:nvPr>
-            <p:ph type="dt" idx="3"/>
-          </p:nvPr>
-        </p:nvSpPr>
-        <p:spPr/>
-        <p:txBody>
-          <a:bodyPr/>
-          <a:p>
-            <a:r>
-              <a:rPr lang="ru-RU"/>
-              <a:t/>
-            </a:r>
-          </a:p>
-        </p:txBody>
-      </p:sp>
-    </p:spTree>
-  </p:cSld>
-</p:sldLayout>
-</file>
-
-<file path=ppt/slideMasters/slideMaster1.xml><?xml version="1.0" encoding="utf-8"?>
-<p:sldMaster xmlns:a="http://schemas.openxmlformats.org/drawingml/2006/main" xmlns:p="http://schemas.openxmlformats.org/presentationml/2006/main" xmlns:r="http://schemas.openxmlformats.org/officeDocument/2006/relationships" xmlns:p14="http://schemas.microsoft.com/office/powerpoint/2010/main" xmlns:p15="http://schemas.microsoft.com/office/powerpoint/2012/main" xmlns:mc="http://schemas.openxmlformats.org/markup-compatibility/2006">
-  <p:cSld>
     <p:spTree>
       <p:nvGrpSpPr>
         <p:cNvPr id="1" name=""/>
@@ -381,8 +46,8 @@
         </p:nvSpPr>
         <p:spPr>
           <a:xfrm>
-            <a:off x="504000" y="561600"/>
-            <a:ext cx="9071280" cy="274680"/>
+            <a:off x="504000" y="561240"/>
+            <a:ext cx="9070920" cy="274680"/>
           </a:xfrm>
           <a:prstGeom prst="rect">
             <a:avLst/>
@@ -435,7 +100,7 @@
         <p:spPr>
           <a:xfrm>
             <a:off x="3447360" y="5165280"/>
-            <a:ext cx="3194640" cy="390240"/>
+            <a:ext cx="3194280" cy="389880"/>
           </a:xfrm>
           <a:prstGeom prst="rect">
             <a:avLst/>
@@ -487,7 +152,7 @@
                 <a:uFillTx/>
                 <a:latin typeface="Times New Roman"/>
               </a:rPr>
-              <a:t> </a:t>
+              <a:t>&lt;нижний колонтитул&gt;</a:t>
             </a:r>
             <a:endParaRPr b="0" lang="ru-RU" sz="1400" strike="noStrike" u="none">
               <a:solidFill>
@@ -513,7 +178,7 @@
         <p:spPr>
           <a:xfrm>
             <a:off x="7227360" y="5165280"/>
-            <a:ext cx="2347920" cy="390240"/>
+            <a:ext cx="2347560" cy="389880"/>
           </a:xfrm>
           <a:prstGeom prst="rect">
             <a:avLst/>
@@ -556,7 +221,7 @@
                 <a:tab algn="l" pos="0"/>
               </a:tabLst>
             </a:pPr>
-            <a:fld id="{CF09347E-EA31-4C66-B694-7D7966C414BD}" type="slidenum">
+            <a:fld id="{BBD383B9-D7FA-42A9-9C41-23B41985C835}" type="slidenum">
               <a:rPr b="0" lang="ru-RU" sz="1400" strike="noStrike" u="none">
                 <a:solidFill>
                   <a:srgbClr val="000000"/>
@@ -565,7 +230,7 @@
                 <a:uFillTx/>
                 <a:latin typeface="Times New Roman"/>
               </a:rPr>
-              <a:t>2</a:t>
+              <a:t>&lt;номер&gt;</a:t>
             </a:fld>
             <a:endParaRPr b="0" lang="ru-RU" sz="1400" strike="noStrike" u="none">
               <a:solidFill>
@@ -591,7 +256,7 @@
         <p:spPr>
           <a:xfrm>
             <a:off x="504000" y="5165280"/>
-            <a:ext cx="2347920" cy="390240"/>
+            <a:ext cx="2347560" cy="389880"/>
           </a:xfrm>
           <a:prstGeom prst="rect">
             <a:avLst/>
@@ -631,7 +296,7 @@
                 <a:uFillTx/>
                 <a:latin typeface="Times New Roman"/>
               </a:rPr>
-              <a:t> </a:t>
+              <a:t>&lt;дата/время&gt;</a:t>
             </a:r>
             <a:endParaRPr b="0" lang="ru-RU" sz="1400" strike="noStrike" u="none">
               <a:solidFill>
@@ -899,6 +564,578 @@
       </p:sp>
     </p:spTree>
   </p:cSld>
+</p:sldLayout>
+</file>
+
+<file path=ppt/slideLayouts/slideLayout2.xml><?xml version="1.0" encoding="utf-8"?>
+<p:sldLayout xmlns:a="http://schemas.openxmlformats.org/drawingml/2006/main" xmlns:p="http://schemas.openxmlformats.org/presentationml/2006/main" xmlns:r="http://schemas.openxmlformats.org/officeDocument/2006/relationships" xmlns:p14="http://schemas.microsoft.com/office/powerpoint/2010/main" xmlns:p15="http://schemas.microsoft.com/office/powerpoint/2012/main" xmlns:mc="http://schemas.openxmlformats.org/markup-compatibility/2006" type="tx" preserve="1">
+  <p:cSld name="Обычный 1">
+    <p:spTree>
+      <p:nvGrpSpPr>
+        <p:cNvPr id="1" name=""/>
+        <p:cNvGrpSpPr/>
+        <p:nvPr/>
+      </p:nvGrpSpPr>
+      <p:grpSpPr>
+        <a:xfrm>
+          <a:off x="0" y="0"/>
+          <a:ext cx="0" cy="0"/>
+          <a:chOff x="0" y="0"/>
+          <a:chExt cx="0" cy="0"/>
+        </a:xfrm>
+      </p:grpSpPr>
+      <p:sp>
+        <p:nvSpPr>
+          <p:cNvPr id="7" name="PlaceHolder 1"/>
+          <p:cNvSpPr>
+            <a:spLocks noGrp="1"/>
+          </p:cNvSpPr>
+          <p:nvPr>
+            <p:ph type="title"/>
+          </p:nvPr>
+        </p:nvSpPr>
+        <p:spPr>
+          <a:xfrm>
+            <a:off x="504000" y="561240"/>
+            <a:ext cx="9070920" cy="274680"/>
+          </a:xfrm>
+          <a:prstGeom prst="rect">
+            <a:avLst/>
+          </a:prstGeom>
+          <a:noFill/>
+          <a:ln w="0">
+            <a:noFill/>
+          </a:ln>
+        </p:spPr>
+        <p:txBody>
+          <a:bodyPr lIns="0" rIns="0" tIns="0" bIns="0" anchor="ctr">
+            <a:spAutoFit/>
+          </a:bodyPr>
+          <a:p>
+            <a:pPr indent="0">
+              <a:buNone/>
+            </a:pPr>
+            <a:r>
+              <a:rPr b="0" lang="ru-RU" sz="1800" strike="noStrike" u="none">
+                <a:solidFill>
+                  <a:srgbClr val="000000"/>
+                </a:solidFill>
+                <a:effectLst/>
+                <a:uFillTx/>
+                <a:latin typeface="Arial"/>
+              </a:rPr>
+              <a:t>Для правки текста заглавия щёлкните мышью</a:t>
+            </a:r>
+            <a:endParaRPr b="0" lang="ru-RU" sz="1800" strike="noStrike" u="none">
+              <a:solidFill>
+                <a:srgbClr val="000000"/>
+              </a:solidFill>
+              <a:effectLst/>
+              <a:uFillTx/>
+              <a:latin typeface="Arial"/>
+            </a:endParaRPr>
+          </a:p>
+        </p:txBody>
+      </p:sp>
+      <p:sp>
+        <p:nvSpPr>
+          <p:cNvPr id="8" name="PlaceHolder 2"/>
+          <p:cNvSpPr>
+            <a:spLocks noGrp="1"/>
+          </p:cNvSpPr>
+          <p:nvPr>
+            <p:ph type="body"/>
+          </p:nvPr>
+        </p:nvSpPr>
+        <p:spPr>
+          <a:xfrm>
+            <a:off x="504000" y="1326600"/>
+            <a:ext cx="9071640" cy="3288240"/>
+          </a:xfrm>
+          <a:prstGeom prst="rect">
+            <a:avLst/>
+          </a:prstGeom>
+          <a:noFill/>
+          <a:ln w="0">
+            <a:noFill/>
+          </a:ln>
+        </p:spPr>
+        <p:txBody>
+          <a:bodyPr lIns="0" rIns="0" tIns="0" bIns="0" anchor="t">
+            <a:normAutofit/>
+          </a:bodyPr>
+          <a:p>
+            <a:pPr marL="432000" indent="-324000">
+              <a:spcBef>
+                <a:spcPts val="1417"/>
+              </a:spcBef>
+              <a:buClr>
+                <a:srgbClr val="000000"/>
+              </a:buClr>
+              <a:buSzPct val="45000"/>
+              <a:buFont typeface="Wingdings" charset="2"/>
+              <a:buChar char=""/>
+            </a:pPr>
+            <a:r>
+              <a:rPr b="0" lang="ru-RU" sz="1800" strike="noStrike" u="none">
+                <a:solidFill>
+                  <a:srgbClr val="000000"/>
+                </a:solidFill>
+                <a:effectLst/>
+                <a:uFillTx/>
+                <a:latin typeface="Arial"/>
+              </a:rPr>
+              <a:t>Для правки структуры щёлкните мышью</a:t>
+            </a:r>
+            <a:endParaRPr b="0" lang="ru-RU" sz="1800" strike="noStrike" u="none">
+              <a:solidFill>
+                <a:srgbClr val="000000"/>
+              </a:solidFill>
+              <a:effectLst/>
+              <a:uFillTx/>
+              <a:latin typeface="Arial"/>
+            </a:endParaRPr>
+          </a:p>
+          <a:p>
+            <a:pPr lvl="1" marL="864000" indent="-324000">
+              <a:spcBef>
+                <a:spcPts val="1134"/>
+              </a:spcBef>
+              <a:buClr>
+                <a:srgbClr val="000000"/>
+              </a:buClr>
+              <a:buSzPct val="75000"/>
+              <a:buFont typeface="Symbol" charset="2"/>
+              <a:buChar char=""/>
+            </a:pPr>
+            <a:r>
+              <a:rPr b="0" lang="ru-RU" sz="1800" strike="noStrike" u="none">
+                <a:solidFill>
+                  <a:srgbClr val="000000"/>
+                </a:solidFill>
+                <a:effectLst/>
+                <a:uFillTx/>
+                <a:latin typeface="Arial"/>
+              </a:rPr>
+              <a:t>Второй уровень структуры</a:t>
+            </a:r>
+            <a:endParaRPr b="0" lang="ru-RU" sz="1800" strike="noStrike" u="none">
+              <a:solidFill>
+                <a:srgbClr val="000000"/>
+              </a:solidFill>
+              <a:effectLst/>
+              <a:uFillTx/>
+              <a:latin typeface="Arial"/>
+            </a:endParaRPr>
+          </a:p>
+          <a:p>
+            <a:pPr lvl="2" marL="1296000" indent="-288000">
+              <a:spcBef>
+                <a:spcPts val="850"/>
+              </a:spcBef>
+              <a:buClr>
+                <a:srgbClr val="000000"/>
+              </a:buClr>
+              <a:buSzPct val="45000"/>
+              <a:buFont typeface="Wingdings" charset="2"/>
+              <a:buChar char=""/>
+            </a:pPr>
+            <a:r>
+              <a:rPr b="0" lang="ru-RU" sz="1800" strike="noStrike" u="none">
+                <a:solidFill>
+                  <a:srgbClr val="000000"/>
+                </a:solidFill>
+                <a:effectLst/>
+                <a:uFillTx/>
+                <a:latin typeface="Arial"/>
+              </a:rPr>
+              <a:t>Третий уровень структуры</a:t>
+            </a:r>
+            <a:endParaRPr b="0" lang="ru-RU" sz="1800" strike="noStrike" u="none">
+              <a:solidFill>
+                <a:srgbClr val="000000"/>
+              </a:solidFill>
+              <a:effectLst/>
+              <a:uFillTx/>
+              <a:latin typeface="Arial"/>
+            </a:endParaRPr>
+          </a:p>
+          <a:p>
+            <a:pPr lvl="3" marL="1728000" indent="-216000">
+              <a:spcBef>
+                <a:spcPts val="567"/>
+              </a:spcBef>
+              <a:buClr>
+                <a:srgbClr val="000000"/>
+              </a:buClr>
+              <a:buSzPct val="75000"/>
+              <a:buFont typeface="Symbol" charset="2"/>
+              <a:buChar char=""/>
+            </a:pPr>
+            <a:r>
+              <a:rPr b="0" lang="ru-RU" sz="1800" strike="noStrike" u="none">
+                <a:solidFill>
+                  <a:srgbClr val="000000"/>
+                </a:solidFill>
+                <a:effectLst/>
+                <a:uFillTx/>
+                <a:latin typeface="Arial"/>
+              </a:rPr>
+              <a:t>Четвёртый уровень структуры</a:t>
+            </a:r>
+            <a:endParaRPr b="0" lang="ru-RU" sz="1800" strike="noStrike" u="none">
+              <a:solidFill>
+                <a:srgbClr val="000000"/>
+              </a:solidFill>
+              <a:effectLst/>
+              <a:uFillTx/>
+              <a:latin typeface="Arial"/>
+            </a:endParaRPr>
+          </a:p>
+          <a:p>
+            <a:pPr lvl="4" marL="2160000" indent="-216000">
+              <a:spcBef>
+                <a:spcPts val="283"/>
+              </a:spcBef>
+              <a:buClr>
+                <a:srgbClr val="000000"/>
+              </a:buClr>
+              <a:buSzPct val="45000"/>
+              <a:buFont typeface="Wingdings" charset="2"/>
+              <a:buChar char=""/>
+            </a:pPr>
+            <a:r>
+              <a:rPr b="0" lang="ru-RU" sz="1800" strike="noStrike" u="none">
+                <a:solidFill>
+                  <a:srgbClr val="000000"/>
+                </a:solidFill>
+                <a:effectLst/>
+                <a:uFillTx/>
+                <a:latin typeface="Arial"/>
+              </a:rPr>
+              <a:t>Пятый уровень структуры</a:t>
+            </a:r>
+            <a:endParaRPr b="0" lang="ru-RU" sz="1800" strike="noStrike" u="none">
+              <a:solidFill>
+                <a:srgbClr val="000000"/>
+              </a:solidFill>
+              <a:effectLst/>
+              <a:uFillTx/>
+              <a:latin typeface="Arial"/>
+            </a:endParaRPr>
+          </a:p>
+          <a:p>
+            <a:pPr lvl="5" marL="2592000" indent="-216000">
+              <a:spcBef>
+                <a:spcPts val="283"/>
+              </a:spcBef>
+              <a:buClr>
+                <a:srgbClr val="000000"/>
+              </a:buClr>
+              <a:buSzPct val="45000"/>
+              <a:buFont typeface="Wingdings" charset="2"/>
+              <a:buChar char=""/>
+            </a:pPr>
+            <a:r>
+              <a:rPr b="0" lang="ru-RU" sz="1800" strike="noStrike" u="none">
+                <a:solidFill>
+                  <a:srgbClr val="000000"/>
+                </a:solidFill>
+                <a:effectLst/>
+                <a:uFillTx/>
+                <a:latin typeface="Arial"/>
+              </a:rPr>
+              <a:t>Шестой уровень структуры</a:t>
+            </a:r>
+            <a:endParaRPr b="0" lang="ru-RU" sz="1800" strike="noStrike" u="none">
+              <a:solidFill>
+                <a:srgbClr val="000000"/>
+              </a:solidFill>
+              <a:effectLst/>
+              <a:uFillTx/>
+              <a:latin typeface="Arial"/>
+            </a:endParaRPr>
+          </a:p>
+          <a:p>
+            <a:pPr lvl="6" marL="3024000" indent="-216000">
+              <a:spcBef>
+                <a:spcPts val="283"/>
+              </a:spcBef>
+              <a:buClr>
+                <a:srgbClr val="000000"/>
+              </a:buClr>
+              <a:buSzPct val="45000"/>
+              <a:buFont typeface="Wingdings" charset="2"/>
+              <a:buChar char=""/>
+            </a:pPr>
+            <a:r>
+              <a:rPr b="0" lang="ru-RU" sz="1800" strike="noStrike" u="none">
+                <a:solidFill>
+                  <a:srgbClr val="000000"/>
+                </a:solidFill>
+                <a:effectLst/>
+                <a:uFillTx/>
+                <a:latin typeface="Arial"/>
+              </a:rPr>
+              <a:t>Седьмой уровень структуры</a:t>
+            </a:r>
+            <a:endParaRPr b="0" lang="ru-RU" sz="1800" strike="noStrike" u="none">
+              <a:solidFill>
+                <a:srgbClr val="000000"/>
+              </a:solidFill>
+              <a:effectLst/>
+              <a:uFillTx/>
+              <a:latin typeface="Arial"/>
+            </a:endParaRPr>
+          </a:p>
+        </p:txBody>
+      </p:sp>
+      <p:sp>
+        <p:nvSpPr>
+          <p:cNvPr id="9" name="PlaceHolder 3"/>
+          <p:cNvSpPr>
+            <a:spLocks noGrp="1"/>
+          </p:cNvSpPr>
+          <p:nvPr>
+            <p:ph type="ftr" idx="4"/>
+          </p:nvPr>
+        </p:nvSpPr>
+        <p:spPr>
+          <a:xfrm>
+            <a:off x="3447360" y="5165280"/>
+            <a:ext cx="3194280" cy="389880"/>
+          </a:xfrm>
+          <a:prstGeom prst="rect">
+            <a:avLst/>
+          </a:prstGeom>
+          <a:noFill/>
+          <a:ln w="0">
+            <a:noFill/>
+          </a:ln>
+        </p:spPr>
+        <p:txBody>
+          <a:bodyPr lIns="0" rIns="0" tIns="0" bIns="0" anchor="t">
+            <a:noAutofit/>
+          </a:bodyPr>
+          <a:lstStyle>
+            <a:lvl1pPr indent="0" algn="ctr">
+              <a:lnSpc>
+                <a:spcPct val="100000"/>
+              </a:lnSpc>
+              <a:buNone/>
+              <a:tabLst>
+                <a:tab algn="l" pos="0"/>
+              </a:tabLst>
+              <a:defRPr b="0" lang="ru-RU" sz="1400" strike="noStrike" u="none">
+                <a:solidFill>
+                  <a:srgbClr val="000000"/>
+                </a:solidFill>
+                <a:effectLst/>
+                <a:uFillTx/>
+                <a:latin typeface="Times New Roman"/>
+              </a:defRPr>
+            </a:lvl1pPr>
+          </a:lstStyle>
+          <a:p>
+            <a:pPr indent="0" algn="ctr">
+              <a:lnSpc>
+                <a:spcPct val="100000"/>
+              </a:lnSpc>
+              <a:buNone/>
+              <a:tabLst>
+                <a:tab algn="l" pos="0"/>
+              </a:tabLst>
+            </a:pPr>
+            <a:r>
+              <a:rPr b="0" lang="ru-RU" sz="1400" strike="noStrike" u="none">
+                <a:solidFill>
+                  <a:srgbClr val="000000"/>
+                </a:solidFill>
+                <a:effectLst/>
+                <a:uFillTx/>
+                <a:latin typeface="Times New Roman"/>
+              </a:rPr>
+              <a:t>&lt;нижний колонтитул&gt;</a:t>
+            </a:r>
+            <a:endParaRPr b="0" lang="ru-RU" sz="1400" strike="noStrike" u="none">
+              <a:solidFill>
+                <a:srgbClr val="000000"/>
+              </a:solidFill>
+              <a:effectLst/>
+              <a:uFillTx/>
+              <a:latin typeface="Times New Roman"/>
+            </a:endParaRPr>
+          </a:p>
+        </p:txBody>
+      </p:sp>
+      <p:sp>
+        <p:nvSpPr>
+          <p:cNvPr id="10" name="PlaceHolder 4"/>
+          <p:cNvSpPr>
+            <a:spLocks noGrp="1"/>
+          </p:cNvSpPr>
+          <p:nvPr>
+            <p:ph type="sldNum" idx="5"/>
+          </p:nvPr>
+        </p:nvSpPr>
+        <p:spPr>
+          <a:xfrm>
+            <a:off x="7227360" y="5165280"/>
+            <a:ext cx="2347560" cy="389880"/>
+          </a:xfrm>
+          <a:prstGeom prst="rect">
+            <a:avLst/>
+          </a:prstGeom>
+          <a:noFill/>
+          <a:ln w="0">
+            <a:noFill/>
+          </a:ln>
+        </p:spPr>
+        <p:txBody>
+          <a:bodyPr lIns="0" rIns="0" tIns="0" bIns="0" anchor="t">
+            <a:noAutofit/>
+          </a:bodyPr>
+          <a:lstStyle>
+            <a:lvl1pPr indent="0" algn="r">
+              <a:lnSpc>
+                <a:spcPct val="100000"/>
+              </a:lnSpc>
+              <a:buNone/>
+              <a:tabLst>
+                <a:tab algn="l" pos="0"/>
+              </a:tabLst>
+              <a:defRPr b="0" lang="ru-RU" sz="1400" strike="noStrike" u="none">
+                <a:solidFill>
+                  <a:srgbClr val="000000"/>
+                </a:solidFill>
+                <a:effectLst/>
+                <a:uFillTx/>
+                <a:latin typeface="Times New Roman"/>
+              </a:defRPr>
+            </a:lvl1pPr>
+          </a:lstStyle>
+          <a:p>
+            <a:pPr indent="0" algn="r">
+              <a:lnSpc>
+                <a:spcPct val="100000"/>
+              </a:lnSpc>
+              <a:buNone/>
+              <a:tabLst>
+                <a:tab algn="l" pos="0"/>
+              </a:tabLst>
+            </a:pPr>
+            <a:fld id="{8954DB95-88F0-4A33-B17C-7187716AFA86}" type="slidenum">
+              <a:rPr b="0" lang="ru-RU" sz="1400" strike="noStrike" u="none">
+                <a:solidFill>
+                  <a:srgbClr val="000000"/>
+                </a:solidFill>
+                <a:effectLst/>
+                <a:uFillTx/>
+                <a:latin typeface="Times New Roman"/>
+              </a:rPr>
+              <a:t>&lt;номер&gt;</a:t>
+            </a:fld>
+            <a:endParaRPr b="0" lang="ru-RU" sz="1400" strike="noStrike" u="none">
+              <a:solidFill>
+                <a:srgbClr val="000000"/>
+              </a:solidFill>
+              <a:effectLst/>
+              <a:uFillTx/>
+              <a:latin typeface="Times New Roman"/>
+            </a:endParaRPr>
+          </a:p>
+        </p:txBody>
+      </p:sp>
+      <p:sp>
+        <p:nvSpPr>
+          <p:cNvPr id="11" name="PlaceHolder 5"/>
+          <p:cNvSpPr>
+            <a:spLocks noGrp="1"/>
+          </p:cNvSpPr>
+          <p:nvPr>
+            <p:ph type="dt" idx="6"/>
+          </p:nvPr>
+        </p:nvSpPr>
+        <p:spPr>
+          <a:xfrm>
+            <a:off x="504000" y="5165280"/>
+            <a:ext cx="2347560" cy="389880"/>
+          </a:xfrm>
+          <a:prstGeom prst="rect">
+            <a:avLst/>
+          </a:prstGeom>
+          <a:noFill/>
+          <a:ln w="0">
+            <a:noFill/>
+          </a:ln>
+        </p:spPr>
+        <p:txBody>
+          <a:bodyPr lIns="0" rIns="0" tIns="0" bIns="0" anchor="t">
+            <a:noAutofit/>
+          </a:bodyPr>
+          <a:lstStyle>
+            <a:lvl1pPr indent="0">
+              <a:buNone/>
+              <a:defRPr b="0" lang="ru-RU" sz="1400" strike="noStrike" u="none">
+                <a:solidFill>
+                  <a:srgbClr val="000000"/>
+                </a:solidFill>
+                <a:effectLst/>
+                <a:uFillTx/>
+                <a:latin typeface="Times New Roman"/>
+              </a:defRPr>
+            </a:lvl1pPr>
+          </a:lstStyle>
+          <a:p>
+            <a:pPr indent="0">
+              <a:buNone/>
+            </a:pPr>
+            <a:r>
+              <a:rPr b="0" lang="ru-RU" sz="1400" strike="noStrike" u="none">
+                <a:solidFill>
+                  <a:srgbClr val="000000"/>
+                </a:solidFill>
+                <a:effectLst/>
+                <a:uFillTx/>
+                <a:latin typeface="Times New Roman"/>
+              </a:rPr>
+              <a:t>&lt;дата/время&gt;</a:t>
+            </a:r>
+            <a:endParaRPr b="0" lang="ru-RU" sz="1400" strike="noStrike" u="none">
+              <a:solidFill>
+                <a:srgbClr val="000000"/>
+              </a:solidFill>
+              <a:effectLst/>
+              <a:uFillTx/>
+              <a:latin typeface="Times New Roman"/>
+            </a:endParaRPr>
+          </a:p>
+        </p:txBody>
+      </p:sp>
+    </p:spTree>
+  </p:cSld>
+</p:sldLayout>
+</file>
+
+<file path=ppt/slideMasters/slideMaster1.xml><?xml version="1.0" encoding="utf-8"?>
+<p:sldMaster xmlns:a="http://schemas.openxmlformats.org/drawingml/2006/main" xmlns:p="http://schemas.openxmlformats.org/presentationml/2006/main" xmlns:r="http://schemas.openxmlformats.org/officeDocument/2006/relationships" xmlns:p14="http://schemas.microsoft.com/office/powerpoint/2010/main" xmlns:p15="http://schemas.microsoft.com/office/powerpoint/2012/main" xmlns:mc="http://schemas.openxmlformats.org/markup-compatibility/2006">
+  <p:cSld>
+    <p:spTree>
+      <p:nvGrpSpPr>
+        <p:cNvPr id="1" name=""/>
+        <p:cNvGrpSpPr/>
+        <p:nvPr/>
+      </p:nvGrpSpPr>
+      <p:grpSpPr>
+        <a:xfrm>
+          <a:off x="0" y="0"/>
+          <a:ext cx="0" cy="0"/>
+          <a:chOff x="0" y="0"/>
+          <a:chExt cx="0" cy="0"/>
+        </a:xfrm>
+      </p:grpSpPr>
+    </p:spTree>
+  </p:cSld>
   <p:clrMap bg1="lt1" tx1="dk1" bg2="lt2" tx2="dk2" accent1="accent1" accent2="accent2" accent3="accent3" accent4="accent4" accent5="accent5" accent6="accent6" hlink="hlink" folHlink="folHlink"/>
   <p:sldLayoutIdLst>
     <p:sldLayoutId id="2147483649" r:id="rId2"/>
@@ -926,7 +1163,7 @@
       </p:grpSpPr>
       <p:sp>
         <p:nvSpPr>
-          <p:cNvPr id="11" name="PlaceHolder 1"/>
+          <p:cNvPr id="12" name="PlaceHolder 1"/>
           <p:cNvSpPr>
             <a:spLocks noGrp="1"/>
           </p:cNvSpPr>
@@ -936,8 +1173,8 @@
         </p:nvSpPr>
         <p:spPr>
           <a:xfrm>
-            <a:off x="504000" y="73800"/>
-            <a:ext cx="9071280" cy="1250640"/>
+            <a:off x="504000" y="180000"/>
+            <a:ext cx="9070920" cy="1251000"/>
           </a:xfrm>
           <a:prstGeom prst="rect">
             <a:avLst/>
@@ -985,7 +1222,7 @@
       </p:sp>
       <p:sp>
         <p:nvSpPr>
-          <p:cNvPr id="12" name="PlaceHolder 2"/>
+          <p:cNvPr id="13" name="PlaceHolder 2"/>
           <p:cNvSpPr>
             <a:spLocks noGrp="1"/>
           </p:cNvSpPr>
@@ -995,8 +1232,8 @@
         </p:nvSpPr>
         <p:spPr>
           <a:xfrm>
-            <a:off x="504000" y="1326240"/>
-            <a:ext cx="9071280" cy="3288600"/>
+            <a:off x="504000" y="1325880"/>
+            <a:ext cx="9070920" cy="3288960"/>
           </a:xfrm>
           <a:prstGeom prst="rect">
             <a:avLst/>
@@ -1007,11 +1244,11 @@
           </a:ln>
         </p:spPr>
         <p:txBody>
-          <a:bodyPr lIns="0" rIns="0" tIns="0" bIns="0" anchor="ctr">
+          <a:bodyPr lIns="0" rIns="0" tIns="0" bIns="0" anchor="ctr" anchorCtr="1">
             <a:spAutoFit/>
           </a:bodyPr>
           <a:p>
-            <a:pPr indent="0" algn="ctr">
+            <a:pPr indent="0" algn="r">
               <a:lnSpc>
                 <a:spcPct val="100000"/>
               </a:lnSpc>
@@ -1029,7 +1266,7 @@
                 <a:uFillTx/>
                 <a:latin typeface="Arial"/>
               </a:rPr>
-              <a:t>Презенатацию подготовила: Мифтахова Виктория</a:t>
+              <a:t>Презентацию подготовила: Мифтахова Виктория</a:t>
             </a:r>
             <a:endParaRPr b="0" lang="ru-RU" sz="3200" strike="noStrike" u="none">
               <a:solidFill>
@@ -1074,7 +1311,7 @@
       </p:grpSpPr>
       <p:sp>
         <p:nvSpPr>
-          <p:cNvPr id="13" name="PlaceHolder 1"/>
+          <p:cNvPr id="14" name="PlaceHolder 1"/>
           <p:cNvSpPr>
             <a:spLocks noGrp="1"/>
           </p:cNvSpPr>
@@ -1084,8 +1321,8 @@
         </p:nvSpPr>
         <p:spPr>
           <a:xfrm>
-            <a:off x="504000" y="386280"/>
-            <a:ext cx="9071280" cy="625320"/>
+            <a:off x="504000" y="385920"/>
+            <a:ext cx="9070920" cy="625680"/>
           </a:xfrm>
           <a:prstGeom prst="rect">
             <a:avLst/>
@@ -1101,7 +1338,13 @@
           </a:bodyPr>
           <a:p>
             <a:pPr indent="0" algn="ctr">
+              <a:lnSpc>
+                <a:spcPct val="100000"/>
+              </a:lnSpc>
               <a:buNone/>
+              <a:tabLst>
+                <a:tab algn="l" pos="0"/>
+              </a:tabLst>
             </a:pPr>
             <a:r>
               <a:rPr b="0" lang="ru-RU" sz="4400" strike="noStrike" u="none">
@@ -1127,7 +1370,7 @@
       </p:sp>
       <p:sp>
         <p:nvSpPr>
-          <p:cNvPr id="14" name="PlaceHolder 2"/>
+          <p:cNvPr id="15" name="PlaceHolder 2"/>
           <p:cNvSpPr>
             <a:spLocks noGrp="1"/>
           </p:cNvSpPr>
@@ -1138,7 +1381,7 @@
         <p:spPr>
           <a:xfrm>
             <a:off x="504000" y="1326600"/>
-            <a:ext cx="4536000" cy="3288600"/>
+            <a:ext cx="4535640" cy="4073400"/>
           </a:xfrm>
           <a:prstGeom prst="rect">
             <a:avLst/>
@@ -1149,11 +1392,14 @@
           </a:ln>
         </p:spPr>
         <p:txBody>
-          <a:bodyPr lIns="0" rIns="0" tIns="0" bIns="0" anchor="t">
-            <a:normAutofit/>
+          <a:bodyPr lIns="0" rIns="0" tIns="0" bIns="0" anchor="ctr">
+            <a:normAutofit lnSpcReduction="9999"/>
           </a:bodyPr>
           <a:p>
             <a:pPr marL="432000" indent="-324000">
+              <a:lnSpc>
+                <a:spcPct val="100000"/>
+              </a:lnSpc>
               <a:spcBef>
                 <a:spcPts val="1417"/>
               </a:spcBef>
@@ -1185,11 +1431,19 @@
             </a:endParaRPr>
           </a:p>
           <a:p>
-            <a:pPr marL="432000" indent="0">
+            <a:pPr marL="432000" indent="-324000">
+              <a:lnSpc>
+                <a:spcPct val="100000"/>
+              </a:lnSpc>
               <a:spcBef>
                 <a:spcPts val="1417"/>
               </a:spcBef>
-              <a:buNone/>
+              <a:buClr>
+                <a:srgbClr val="000000"/>
+              </a:buClr>
+              <a:buSzPct val="45000"/>
+              <a:buFont typeface="Wingdings" charset="2"/>
+              <a:buChar char=""/>
             </a:pPr>
             <a:r>
               <a:rPr b="0" lang="ru-RU" sz="3200" strike="noStrike" u="none">
@@ -1200,7 +1454,112 @@
                 <a:uFillTx/>
                 <a:latin typeface="Arial"/>
               </a:rPr>
-              <a:t> </a:t>
+              <a:t>Личная свобода</a:t>
+            </a:r>
+            <a:endParaRPr b="0" lang="ru-RU" sz="3200" strike="noStrike" u="none">
+              <a:solidFill>
+                <a:srgbClr val="000000"/>
+              </a:solidFill>
+              <a:effectLst/>
+              <a:uFillTx/>
+              <a:latin typeface="Arial"/>
+            </a:endParaRPr>
+          </a:p>
+          <a:p>
+            <a:pPr marL="432000" indent="-324000">
+              <a:lnSpc>
+                <a:spcPct val="100000"/>
+              </a:lnSpc>
+              <a:spcBef>
+                <a:spcPts val="1417"/>
+              </a:spcBef>
+              <a:buClr>
+                <a:srgbClr val="000000"/>
+              </a:buClr>
+              <a:buSzPct val="45000"/>
+              <a:buFont typeface="Wingdings" charset="2"/>
+              <a:buChar char=""/>
+            </a:pPr>
+            <a:r>
+              <a:rPr b="0" lang="ru-RU" sz="3200" strike="noStrike" u="none">
+                <a:solidFill>
+                  <a:srgbClr val="000000"/>
+                </a:solidFill>
+                <a:effectLst/>
+                <a:uFillTx/>
+                <a:latin typeface="Arial"/>
+              </a:rPr>
+              <a:t>Идентичность</a:t>
+            </a:r>
+            <a:endParaRPr b="0" lang="ru-RU" sz="3200" strike="noStrike" u="none">
+              <a:solidFill>
+                <a:srgbClr val="000000"/>
+              </a:solidFill>
+              <a:effectLst/>
+              <a:uFillTx/>
+              <a:latin typeface="Arial"/>
+            </a:endParaRPr>
+          </a:p>
+          <a:p>
+            <a:pPr marL="432000" indent="-324000">
+              <a:lnSpc>
+                <a:spcPct val="100000"/>
+              </a:lnSpc>
+              <a:spcBef>
+                <a:spcPts val="1417"/>
+              </a:spcBef>
+              <a:buClr>
+                <a:srgbClr val="000000"/>
+              </a:buClr>
+              <a:buSzPct val="45000"/>
+              <a:buFont typeface="Wingdings" charset="2"/>
+              <a:buChar char=""/>
+            </a:pPr>
+            <a:r>
+              <a:rPr b="0" lang="ru-RU" sz="3200" strike="noStrike" u="none">
+                <a:solidFill>
+                  <a:srgbClr val="000000"/>
+                </a:solidFill>
+                <a:effectLst/>
+                <a:uFillTx/>
+                <a:latin typeface="Arial"/>
+              </a:rPr>
+              <a:t>Гибкость</a:t>
+            </a:r>
+            <a:endParaRPr b="0" lang="ru-RU" sz="3200" strike="noStrike" u="none">
+              <a:solidFill>
+                <a:srgbClr val="000000"/>
+              </a:solidFill>
+              <a:effectLst/>
+              <a:uFillTx/>
+              <a:latin typeface="Arial"/>
+            </a:endParaRPr>
+          </a:p>
+          <a:p>
+            <a:pPr marL="432000" indent="-324000">
+              <a:lnSpc>
+                <a:spcPct val="100000"/>
+              </a:lnSpc>
+              <a:spcBef>
+                <a:spcPts val="1417"/>
+              </a:spcBef>
+              <a:buClr>
+                <a:srgbClr val="000000"/>
+              </a:buClr>
+              <a:buSzPct val="45000"/>
+              <a:buFont typeface="Wingdings" charset="2"/>
+              <a:buChar char=""/>
+            </a:pPr>
+            <a:r>
+              <a:rPr b="0" lang="ru-RU" sz="3200" strike="noStrike" u="none">
+                <a:solidFill>
+                  <a:srgbClr val="000000"/>
+                </a:solidFill>
+                <a:effectLst/>
+                <a:uFillTx/>
+                <a:latin typeface="Arial"/>
+              </a:rPr>
+              <a:t>Непрерывное развитие </a:t>
             </a:r>
             <a:endParaRPr b="0" lang="ru-RU" sz="3200" strike="noStrike" u="none">
               <a:solidFill>
@@ -1213,6 +1572,31 @@
           </a:p>
         </p:txBody>
       </p:sp>
+      <p:pic>
+        <p:nvPicPr>
+          <p:cNvPr id="16" name="" descr=""/>
+          <p:cNvPicPr/>
+          <p:nvPr/>
+        </p:nvPicPr>
+        <p:blipFill>
+          <a:blip r:embed="rId1"/>
+          <a:srcRect l="0" t="8996" r="0" b="11192"/>
+          <a:stretch/>
+        </p:blipFill>
+        <p:spPr>
+          <a:xfrm>
+            <a:off x="5029200" y="1440000"/>
+            <a:ext cx="4510800" cy="3600000"/>
+          </a:xfrm>
+          <a:prstGeom prst="rect">
+            <a:avLst/>
+          </a:prstGeom>
+          <a:noFill/>
+          <a:ln w="0">
+            <a:noFill/>
+          </a:ln>
+        </p:spPr>
+      </p:pic>
     </p:spTree>
   </p:cSld>
   <mc:AlternateContent>
@@ -1245,7 +1629,7 @@
       </p:grpSpPr>
       <p:sp>
         <p:nvSpPr>
-          <p:cNvPr id="15" name="PlaceHolder 1"/>
+          <p:cNvPr id="17" name="PlaceHolder 1"/>
           <p:cNvSpPr>
             <a:spLocks noGrp="1"/>
           </p:cNvSpPr>
@@ -1255,8 +1639,8 @@
         </p:nvSpPr>
         <p:spPr>
           <a:xfrm>
-            <a:off x="504000" y="386280"/>
-            <a:ext cx="9071280" cy="625320"/>
+            <a:off x="504000" y="385920"/>
+            <a:ext cx="9070920" cy="625680"/>
           </a:xfrm>
           <a:prstGeom prst="rect">
             <a:avLst/>
@@ -1272,7 +1656,13 @@
           </a:bodyPr>
           <a:p>
             <a:pPr indent="0" algn="ctr">
+              <a:lnSpc>
+                <a:spcPct val="100000"/>
+              </a:lnSpc>
               <a:buNone/>
+              <a:tabLst>
+                <a:tab algn="l" pos="0"/>
+              </a:tabLst>
             </a:pPr>
             <a:r>
               <a:rPr b="0" lang="ru-RU" sz="4400" strike="noStrike" u="none">
@@ -1298,7 +1688,7 @@
       </p:sp>
       <p:sp>
         <p:nvSpPr>
-          <p:cNvPr id="16" name="PlaceHolder 2"/>
+          <p:cNvPr id="18" name="PlaceHolder 2"/>
           <p:cNvSpPr>
             <a:spLocks noGrp="1"/>
           </p:cNvSpPr>
@@ -1308,8 +1698,8 @@
         </p:nvSpPr>
         <p:spPr>
           <a:xfrm>
-            <a:off x="504000" y="1326600"/>
-            <a:ext cx="4536000" cy="3288600"/>
+            <a:off x="5039640" y="1326600"/>
+            <a:ext cx="4535640" cy="3288240"/>
           </a:xfrm>
           <a:prstGeom prst="rect">
             <a:avLst/>
@@ -1325,6 +1715,9 @@
           </a:bodyPr>
           <a:p>
             <a:pPr marL="432000" indent="-324000">
+              <a:lnSpc>
+                <a:spcPct val="100000"/>
+              </a:lnSpc>
               <a:spcBef>
                 <a:spcPts val="1417"/>
               </a:spcBef>
@@ -1357,6 +1750,9 @@
           </a:p>
           <a:p>
             <a:pPr marL="432000" indent="-324000">
+              <a:lnSpc>
+                <a:spcPct val="100000"/>
+              </a:lnSpc>
               <a:spcBef>
                 <a:spcPts val="1417"/>
               </a:spcBef>
@@ -1400,6 +1796,9 @@
           </a:p>
           <a:p>
             <a:pPr lvl="1" marL="864000" indent="-324000">
+              <a:lnSpc>
+                <a:spcPct val="100000"/>
+              </a:lnSpc>
               <a:spcBef>
                 <a:spcPts val="1134"/>
               </a:spcBef>
@@ -1432,6 +1831,9 @@
           </a:p>
           <a:p>
             <a:pPr lvl="1" marL="864000" indent="-324000">
+              <a:lnSpc>
+                <a:spcPct val="100000"/>
+              </a:lnSpc>
               <a:spcBef>
                 <a:spcPts val="1134"/>
               </a:spcBef>
@@ -1496,7 +1898,7 @@
       </p:grpSpPr>
       <p:sp>
         <p:nvSpPr>
-          <p:cNvPr id="17" name="PlaceHolder 1"/>
+          <p:cNvPr id="19" name="PlaceHolder 1"/>
           <p:cNvSpPr>
             <a:spLocks noGrp="1"/>
           </p:cNvSpPr>
@@ -1506,8 +1908,8 @@
         </p:nvSpPr>
         <p:spPr>
           <a:xfrm>
-            <a:off x="504000" y="386280"/>
-            <a:ext cx="9071280" cy="625320"/>
+            <a:off x="504000" y="385920"/>
+            <a:ext cx="9070920" cy="625680"/>
           </a:xfrm>
           <a:prstGeom prst="rect">
             <a:avLst/>
@@ -1523,7 +1925,13 @@
           </a:bodyPr>
           <a:p>
             <a:pPr indent="0" algn="ctr">
+              <a:lnSpc>
+                <a:spcPct val="100000"/>
+              </a:lnSpc>
               <a:buNone/>
+              <a:tabLst>
+                <a:tab algn="l" pos="0"/>
+              </a:tabLst>
             </a:pPr>
             <a:r>
               <a:rPr b="0" lang="ru-RU" sz="4400" strike="noStrike" u="none">
@@ -1549,7 +1957,7 @@
       </p:sp>
       <p:sp>
         <p:nvSpPr>
-          <p:cNvPr id="18" name="PlaceHolder 2"/>
+          <p:cNvPr id="20" name="PlaceHolder 2"/>
           <p:cNvSpPr>
             <a:spLocks noGrp="1"/>
           </p:cNvSpPr>
@@ -1560,7 +1968,7 @@
         <p:spPr>
           <a:xfrm>
             <a:off x="504000" y="1080000"/>
-            <a:ext cx="4536000" cy="4320000"/>
+            <a:ext cx="4535640" cy="4319640"/>
           </a:xfrm>
           <a:prstGeom prst="rect">
             <a:avLst/>
@@ -1576,6 +1984,9 @@
           </a:bodyPr>
           <a:p>
             <a:pPr marL="432000" indent="-324000">
+              <a:lnSpc>
+                <a:spcPct val="100000"/>
+              </a:lnSpc>
               <a:spcBef>
                 <a:spcPts val="1417"/>
               </a:spcBef>
@@ -1608,6 +2019,9 @@
           </a:p>
           <a:p>
             <a:pPr marL="432000" indent="-324000">
+              <a:lnSpc>
+                <a:spcPct val="100000"/>
+              </a:lnSpc>
               <a:spcBef>
                 <a:spcPts val="1417"/>
               </a:spcBef>
@@ -1640,6 +2054,9 @@
           </a:p>
           <a:p>
             <a:pPr marL="432000" indent="-324000">
+              <a:lnSpc>
+                <a:spcPct val="100000"/>
+              </a:lnSpc>
               <a:spcBef>
                 <a:spcPts val="1417"/>
               </a:spcBef>
@@ -1672,6 +2089,9 @@
           </a:p>
           <a:p>
             <a:pPr marL="432000" indent="-324000">
+              <a:lnSpc>
+                <a:spcPct val="100000"/>
+              </a:lnSpc>
               <a:spcBef>
                 <a:spcPts val="1417"/>
               </a:spcBef>
@@ -1706,7 +2126,7 @@
       </p:sp>
       <p:pic>
         <p:nvPicPr>
-          <p:cNvPr id="19" name="" descr=""/>
+          <p:cNvPr id="21" name="" descr=""/>
           <p:cNvPicPr/>
           <p:nvPr/>
         </p:nvPicPr>
@@ -1716,8 +2136,8 @@
         </p:blipFill>
         <p:spPr>
           <a:xfrm>
-            <a:off x="5451120" y="1080000"/>
-            <a:ext cx="4351320" cy="2160000"/>
+            <a:off x="5451120" y="1620000"/>
+            <a:ext cx="4350960" cy="2159640"/>
           </a:xfrm>
           <a:prstGeom prst="rect">
             <a:avLst/>
@@ -1728,6 +2148,262 @@
           </a:ln>
         </p:spPr>
       </p:pic>
+    </p:spTree>
+  </p:cSld>
+  <mc:AlternateContent>
+    <mc:Choice Requires="p14">
+      <p:transition spd="slow" p14:dur="2000"/>
+    </mc:Choice>
+    <mc:Fallback>
+      <p:transition spd="slow"/>
+    </mc:Fallback>
+  </mc:AlternateContent>
+</p:sld>
+</file>
+
+<file path=ppt/slides/slide5.xml><?xml version="1.0" encoding="utf-8"?>
+<p:sld xmlns:a="http://schemas.openxmlformats.org/drawingml/2006/main" xmlns:p="http://schemas.openxmlformats.org/presentationml/2006/main" xmlns:r="http://schemas.openxmlformats.org/officeDocument/2006/relationships" xmlns:p14="http://schemas.microsoft.com/office/powerpoint/2010/main" xmlns:p15="http://schemas.microsoft.com/office/powerpoint/2012/main" xmlns:mc="http://schemas.openxmlformats.org/markup-compatibility/2006">
+  <p:cSld>
+    <p:spTree>
+      <p:nvGrpSpPr>
+        <p:cNvPr id="1" name=""/>
+        <p:cNvGrpSpPr/>
+        <p:nvPr/>
+      </p:nvGrpSpPr>
+      <p:grpSpPr>
+        <a:xfrm>
+          <a:off x="0" y="0"/>
+          <a:ext cx="0" cy="0"/>
+          <a:chOff x="0" y="0"/>
+          <a:chExt cx="0" cy="0"/>
+        </a:xfrm>
+      </p:grpSpPr>
+      <p:sp>
+        <p:nvSpPr>
+          <p:cNvPr id="22" name="PlaceHolder 1"/>
+          <p:cNvSpPr>
+            <a:spLocks noGrp="1"/>
+          </p:cNvSpPr>
+          <p:nvPr>
+            <p:ph type="title"/>
+          </p:nvPr>
+        </p:nvSpPr>
+        <p:spPr>
+          <a:xfrm>
+            <a:off x="504000" y="385920"/>
+            <a:ext cx="9070920" cy="625320"/>
+          </a:xfrm>
+          <a:prstGeom prst="rect">
+            <a:avLst/>
+          </a:prstGeom>
+          <a:noFill/>
+          <a:ln w="0">
+            <a:noFill/>
+          </a:ln>
+        </p:spPr>
+        <p:txBody>
+          <a:bodyPr lIns="0" rIns="0" tIns="0" bIns="0" anchor="ctr">
+            <a:spAutoFit/>
+          </a:bodyPr>
+          <a:p>
+            <a:pPr indent="0" algn="ctr">
+              <a:buNone/>
+            </a:pPr>
+            <a:r>
+              <a:rPr b="0" lang="ru-RU" sz="4400" strike="noStrike" u="none">
+                <a:solidFill>
+                  <a:srgbClr val="000000"/>
+                </a:solidFill>
+                <a:effectLst/>
+                <a:uFillTx/>
+                <a:latin typeface="Arial"/>
+              </a:rPr>
+              <a:t>Образ современного человека</a:t>
+            </a:r>
+            <a:endParaRPr b="0" lang="ru-RU" sz="4400" strike="noStrike" u="none">
+              <a:solidFill>
+                <a:srgbClr val="000000"/>
+              </a:solidFill>
+              <a:effectLst/>
+              <a:uFillTx/>
+              <a:latin typeface="Arial"/>
+            </a:endParaRPr>
+          </a:p>
+        </p:txBody>
+      </p:sp>
+      <p:sp>
+        <p:nvSpPr>
+          <p:cNvPr id="23" name="PlaceHolder 2"/>
+          <p:cNvSpPr>
+            <a:spLocks noGrp="1"/>
+          </p:cNvSpPr>
+          <p:nvPr>
+            <p:ph/>
+          </p:nvPr>
+        </p:nvSpPr>
+        <p:spPr>
+          <a:xfrm>
+            <a:off x="504000" y="1326600"/>
+            <a:ext cx="9071640" cy="3288240"/>
+          </a:xfrm>
+          <a:prstGeom prst="rect">
+            <a:avLst/>
+          </a:prstGeom>
+          <a:noFill/>
+          <a:ln w="0">
+            <a:noFill/>
+          </a:ln>
+        </p:spPr>
+        <p:txBody>
+          <a:bodyPr lIns="0" rIns="0" tIns="0" bIns="0" anchor="t">
+            <a:normAutofit/>
+          </a:bodyPr>
+          <a:p>
+            <a:pPr indent="0">
+              <a:spcBef>
+                <a:spcPts val="1417"/>
+              </a:spcBef>
+              <a:buNone/>
+            </a:pPr>
+            <a:endParaRPr b="0" lang="ru-RU" sz="3200" strike="noStrike" u="none">
+              <a:solidFill>
+                <a:srgbClr val="000000"/>
+              </a:solidFill>
+              <a:effectLst/>
+              <a:uFillTx/>
+              <a:latin typeface="Arial"/>
+            </a:endParaRPr>
+          </a:p>
+        </p:txBody>
+      </p:sp>
+    </p:spTree>
+  </p:cSld>
+  <mc:AlternateContent>
+    <mc:Choice Requires="p14">
+      <p:transition spd="slow" p14:dur="2000"/>
+    </mc:Choice>
+    <mc:Fallback>
+      <p:transition spd="slow"/>
+    </mc:Fallback>
+  </mc:AlternateContent>
+</p:sld>
+</file>
+
+<file path=ppt/slides/slide6.xml><?xml version="1.0" encoding="utf-8"?>
+<p:sld xmlns:a="http://schemas.openxmlformats.org/drawingml/2006/main" xmlns:p="http://schemas.openxmlformats.org/presentationml/2006/main" xmlns:r="http://schemas.openxmlformats.org/officeDocument/2006/relationships" xmlns:p14="http://schemas.microsoft.com/office/powerpoint/2010/main" xmlns:p15="http://schemas.microsoft.com/office/powerpoint/2012/main" xmlns:mc="http://schemas.openxmlformats.org/markup-compatibility/2006">
+  <p:cSld>
+    <p:spTree>
+      <p:nvGrpSpPr>
+        <p:cNvPr id="1" name=""/>
+        <p:cNvGrpSpPr/>
+        <p:nvPr/>
+      </p:nvGrpSpPr>
+      <p:grpSpPr>
+        <a:xfrm>
+          <a:off x="0" y="0"/>
+          <a:ext cx="0" cy="0"/>
+          <a:chOff x="0" y="0"/>
+          <a:chExt cx="0" cy="0"/>
+        </a:xfrm>
+      </p:grpSpPr>
+      <p:sp>
+        <p:nvSpPr>
+          <p:cNvPr id="24" name="PlaceHolder 1"/>
+          <p:cNvSpPr>
+            <a:spLocks noGrp="1"/>
+          </p:cNvSpPr>
+          <p:nvPr>
+            <p:ph type="title"/>
+          </p:nvPr>
+        </p:nvSpPr>
+        <p:spPr>
+          <a:xfrm>
+            <a:off x="504000" y="385920"/>
+            <a:ext cx="9070920" cy="625320"/>
+          </a:xfrm>
+          <a:prstGeom prst="rect">
+            <a:avLst/>
+          </a:prstGeom>
+          <a:noFill/>
+          <a:ln w="0">
+            <a:noFill/>
+          </a:ln>
+        </p:spPr>
+        <p:txBody>
+          <a:bodyPr lIns="0" rIns="0" tIns="0" bIns="0" anchor="ctr">
+            <a:spAutoFit/>
+          </a:bodyPr>
+          <a:p>
+            <a:pPr indent="0" algn="ctr">
+              <a:buNone/>
+            </a:pPr>
+            <a:r>
+              <a:rPr b="0" lang="ru-RU" sz="4400" strike="noStrike" u="none">
+                <a:solidFill>
+                  <a:srgbClr val="000000"/>
+                </a:solidFill>
+                <a:effectLst/>
+                <a:uFillTx/>
+                <a:latin typeface="Arial"/>
+              </a:rPr>
+              <a:t>Источники</a:t>
+            </a:r>
+            <a:endParaRPr b="0" lang="ru-RU" sz="4400" strike="noStrike" u="none">
+              <a:solidFill>
+                <a:srgbClr val="000000"/>
+              </a:solidFill>
+              <a:effectLst/>
+              <a:uFillTx/>
+              <a:latin typeface="Arial"/>
+            </a:endParaRPr>
+          </a:p>
+        </p:txBody>
+      </p:sp>
+      <p:sp>
+        <p:nvSpPr>
+          <p:cNvPr id="25" name="PlaceHolder 2"/>
+          <p:cNvSpPr>
+            <a:spLocks noGrp="1"/>
+          </p:cNvSpPr>
+          <p:nvPr>
+            <p:ph/>
+          </p:nvPr>
+        </p:nvSpPr>
+        <p:spPr>
+          <a:xfrm>
+            <a:off x="504000" y="1326600"/>
+            <a:ext cx="9071640" cy="3288240"/>
+          </a:xfrm>
+          <a:prstGeom prst="rect">
+            <a:avLst/>
+          </a:prstGeom>
+          <a:noFill/>
+          <a:ln w="0">
+            <a:noFill/>
+          </a:ln>
+        </p:spPr>
+        <p:txBody>
+          <a:bodyPr lIns="0" rIns="0" tIns="0" bIns="0" anchor="t">
+            <a:normAutofit/>
+          </a:bodyPr>
+          <a:p>
+            <a:pPr indent="0">
+              <a:spcBef>
+                <a:spcPts val="1417"/>
+              </a:spcBef>
+              <a:buNone/>
+            </a:pPr>
+            <a:endParaRPr b="0" lang="ru-RU" sz="3200" strike="noStrike" u="none">
+              <a:solidFill>
+                <a:srgbClr val="000000"/>
+              </a:solidFill>
+              <a:effectLst/>
+              <a:uFillTx/>
+              <a:latin typeface="Arial"/>
+            </a:endParaRPr>
+          </a:p>
+        </p:txBody>
+      </p:sp>
     </p:spTree>
   </p:cSld>
   <mc:AlternateContent>

--- a/Для других/Victoria NAtus VIncere est.pptx
+++ b/Для других/Victoria NAtus VIncere est.pptx
@@ -47,7 +47,7 @@
         <p:spPr>
           <a:xfrm>
             <a:off x="504000" y="561240"/>
-            <a:ext cx="9070920" cy="274680"/>
+            <a:ext cx="9070200" cy="274680"/>
           </a:xfrm>
           <a:prstGeom prst="rect">
             <a:avLst/>
@@ -63,7 +63,13 @@
           </a:bodyPr>
           <a:p>
             <a:pPr indent="0">
+              <a:lnSpc>
+                <a:spcPct val="100000"/>
+              </a:lnSpc>
               <a:buNone/>
+              <a:tabLst>
+                <a:tab algn="l" pos="0"/>
+              </a:tabLst>
             </a:pPr>
             <a:r>
               <a:rPr b="0" lang="ru-RU" sz="1800" strike="noStrike" u="none">
@@ -100,7 +106,7 @@
         <p:spPr>
           <a:xfrm>
             <a:off x="3447360" y="5165280"/>
-            <a:ext cx="3194280" cy="389880"/>
+            <a:ext cx="3193560" cy="389160"/>
           </a:xfrm>
           <a:prstGeom prst="rect">
             <a:avLst/>
@@ -178,7 +184,7 @@
         <p:spPr>
           <a:xfrm>
             <a:off x="7227360" y="5165280"/>
-            <a:ext cx="2347560" cy="389880"/>
+            <a:ext cx="2346840" cy="389160"/>
           </a:xfrm>
           <a:prstGeom prst="rect">
             <a:avLst/>
@@ -221,7 +227,7 @@
                 <a:tab algn="l" pos="0"/>
               </a:tabLst>
             </a:pPr>
-            <a:fld id="{BBD383B9-D7FA-42A9-9C41-23B41985C835}" type="slidenum">
+            <a:fld id="{040EBC9B-10D1-4C1C-A562-BA3AE37AA5B1}" type="slidenum">
               <a:rPr b="0" lang="ru-RU" sz="1400" strike="noStrike" u="none">
                 <a:solidFill>
                   <a:srgbClr val="000000"/>
@@ -256,7 +262,7 @@
         <p:spPr>
           <a:xfrm>
             <a:off x="504000" y="5165280"/>
-            <a:ext cx="2347560" cy="389880"/>
+            <a:ext cx="2346840" cy="389160"/>
           </a:xfrm>
           <a:prstGeom prst="rect">
             <a:avLst/>
@@ -272,7 +278,13 @@
           </a:bodyPr>
           <a:lstStyle>
             <a:lvl1pPr indent="0">
+              <a:lnSpc>
+                <a:spcPct val="100000"/>
+              </a:lnSpc>
               <a:buNone/>
+              <a:tabLst>
+                <a:tab algn="l" pos="0"/>
+              </a:tabLst>
               <a:defRPr b="0" lang="ru-RU" sz="1400" strike="noStrike" u="none">
                 <a:solidFill>
                   <a:srgbClr val="000000"/>
@@ -285,7 +297,13 @@
           </a:lstStyle>
           <a:p>
             <a:pPr indent="0">
+              <a:lnSpc>
+                <a:spcPct val="100000"/>
+              </a:lnSpc>
               <a:buNone/>
+              <a:tabLst>
+                <a:tab algn="l" pos="0"/>
+              </a:tabLst>
             </a:pPr>
             <a:r>
               <a:rPr b="0" lang="ru-RU" sz="1400" strike="noStrike" u="none">
@@ -322,7 +340,7 @@
         <p:spPr>
           <a:xfrm>
             <a:off x="504000" y="1326600"/>
-            <a:ext cx="9072000" cy="3288600"/>
+            <a:ext cx="9071280" cy="3287880"/>
           </a:xfrm>
           <a:prstGeom prst="rect">
             <a:avLst/>
@@ -338,6 +356,9 @@
           </a:bodyPr>
           <a:p>
             <a:pPr marL="432000" indent="-324000">
+              <a:lnSpc>
+                <a:spcPct val="100000"/>
+              </a:lnSpc>
               <a:spcBef>
                 <a:spcPts val="1417"/>
               </a:spcBef>
@@ -370,6 +391,9 @@
           </a:p>
           <a:p>
             <a:pPr lvl="1" marL="864000" indent="-324000">
+              <a:lnSpc>
+                <a:spcPct val="100000"/>
+              </a:lnSpc>
               <a:spcBef>
                 <a:spcPts val="1134"/>
               </a:spcBef>
@@ -402,6 +426,9 @@
           </a:p>
           <a:p>
             <a:pPr lvl="2" marL="1296000" indent="-288000">
+              <a:lnSpc>
+                <a:spcPct val="100000"/>
+              </a:lnSpc>
               <a:spcBef>
                 <a:spcPts val="850"/>
               </a:spcBef>
@@ -434,6 +461,9 @@
           </a:p>
           <a:p>
             <a:pPr lvl="3" marL="1728000" indent="-216000">
+              <a:lnSpc>
+                <a:spcPct val="100000"/>
+              </a:lnSpc>
               <a:spcBef>
                 <a:spcPts val="567"/>
               </a:spcBef>
@@ -466,6 +496,9 @@
           </a:p>
           <a:p>
             <a:pPr lvl="4" marL="2160000" indent="-216000">
+              <a:lnSpc>
+                <a:spcPct val="100000"/>
+              </a:lnSpc>
               <a:spcBef>
                 <a:spcPts val="283"/>
               </a:spcBef>
@@ -498,6 +531,9 @@
           </a:p>
           <a:p>
             <a:pPr lvl="5" marL="2592000" indent="-216000">
+              <a:lnSpc>
+                <a:spcPct val="100000"/>
+              </a:lnSpc>
               <a:spcBef>
                 <a:spcPts val="283"/>
               </a:spcBef>
@@ -530,6 +566,9 @@
           </a:p>
           <a:p>
             <a:pPr lvl="6" marL="3024000" indent="-216000">
+              <a:lnSpc>
+                <a:spcPct val="100000"/>
+              </a:lnSpc>
               <a:spcBef>
                 <a:spcPts val="283"/>
               </a:spcBef>
@@ -597,7 +636,7 @@
         <p:spPr>
           <a:xfrm>
             <a:off x="504000" y="561240"/>
-            <a:ext cx="9070920" cy="274680"/>
+            <a:ext cx="9070200" cy="274680"/>
           </a:xfrm>
           <a:prstGeom prst="rect">
             <a:avLst/>
@@ -613,7 +652,13 @@
           </a:bodyPr>
           <a:p>
             <a:pPr indent="0">
+              <a:lnSpc>
+                <a:spcPct val="100000"/>
+              </a:lnSpc>
               <a:buNone/>
+              <a:tabLst>
+                <a:tab algn="l" pos="0"/>
+              </a:tabLst>
             </a:pPr>
             <a:r>
               <a:rPr b="0" lang="ru-RU" sz="1800" strike="noStrike" u="none">
@@ -650,7 +695,7 @@
         <p:spPr>
           <a:xfrm>
             <a:off x="504000" y="1326600"/>
-            <a:ext cx="9071640" cy="3288240"/>
+            <a:ext cx="9070920" cy="3287520"/>
           </a:xfrm>
           <a:prstGeom prst="rect">
             <a:avLst/>
@@ -666,6 +711,9 @@
           </a:bodyPr>
           <a:p>
             <a:pPr marL="432000" indent="-324000">
+              <a:lnSpc>
+                <a:spcPct val="100000"/>
+              </a:lnSpc>
               <a:spcBef>
                 <a:spcPts val="1417"/>
               </a:spcBef>
@@ -698,6 +746,9 @@
           </a:p>
           <a:p>
             <a:pPr lvl="1" marL="864000" indent="-324000">
+              <a:lnSpc>
+                <a:spcPct val="100000"/>
+              </a:lnSpc>
               <a:spcBef>
                 <a:spcPts val="1134"/>
               </a:spcBef>
@@ -730,6 +781,9 @@
           </a:p>
           <a:p>
             <a:pPr lvl="2" marL="1296000" indent="-288000">
+              <a:lnSpc>
+                <a:spcPct val="100000"/>
+              </a:lnSpc>
               <a:spcBef>
                 <a:spcPts val="850"/>
               </a:spcBef>
@@ -762,6 +816,9 @@
           </a:p>
           <a:p>
             <a:pPr lvl="3" marL="1728000" indent="-216000">
+              <a:lnSpc>
+                <a:spcPct val="100000"/>
+              </a:lnSpc>
               <a:spcBef>
                 <a:spcPts val="567"/>
               </a:spcBef>
@@ -794,6 +851,9 @@
           </a:p>
           <a:p>
             <a:pPr lvl="4" marL="2160000" indent="-216000">
+              <a:lnSpc>
+                <a:spcPct val="100000"/>
+              </a:lnSpc>
               <a:spcBef>
                 <a:spcPts val="283"/>
               </a:spcBef>
@@ -826,6 +886,9 @@
           </a:p>
           <a:p>
             <a:pPr lvl="5" marL="2592000" indent="-216000">
+              <a:lnSpc>
+                <a:spcPct val="100000"/>
+              </a:lnSpc>
               <a:spcBef>
                 <a:spcPts val="283"/>
               </a:spcBef>
@@ -858,6 +921,9 @@
           </a:p>
           <a:p>
             <a:pPr lvl="6" marL="3024000" indent="-216000">
+              <a:lnSpc>
+                <a:spcPct val="100000"/>
+              </a:lnSpc>
               <a:spcBef>
                 <a:spcPts val="283"/>
               </a:spcBef>
@@ -903,7 +969,7 @@
         <p:spPr>
           <a:xfrm>
             <a:off x="3447360" y="5165280"/>
-            <a:ext cx="3194280" cy="389880"/>
+            <a:ext cx="3193560" cy="389160"/>
           </a:xfrm>
           <a:prstGeom prst="rect">
             <a:avLst/>
@@ -981,7 +1047,7 @@
         <p:spPr>
           <a:xfrm>
             <a:off x="7227360" y="5165280"/>
-            <a:ext cx="2347560" cy="389880"/>
+            <a:ext cx="2346840" cy="389160"/>
           </a:xfrm>
           <a:prstGeom prst="rect">
             <a:avLst/>
@@ -1024,7 +1090,7 @@
                 <a:tab algn="l" pos="0"/>
               </a:tabLst>
             </a:pPr>
-            <a:fld id="{8954DB95-88F0-4A33-B17C-7187716AFA86}" type="slidenum">
+            <a:fld id="{2D82CEA0-5774-4C66-9B4F-98D9685F3E21}" type="slidenum">
               <a:rPr b="0" lang="ru-RU" sz="1400" strike="noStrike" u="none">
                 <a:solidFill>
                   <a:srgbClr val="000000"/>
@@ -1059,7 +1125,7 @@
         <p:spPr>
           <a:xfrm>
             <a:off x="504000" y="5165280"/>
-            <a:ext cx="2347560" cy="389880"/>
+            <a:ext cx="2346840" cy="389160"/>
           </a:xfrm>
           <a:prstGeom prst="rect">
             <a:avLst/>
@@ -1075,7 +1141,13 @@
           </a:bodyPr>
           <a:lstStyle>
             <a:lvl1pPr indent="0">
+              <a:lnSpc>
+                <a:spcPct val="100000"/>
+              </a:lnSpc>
               <a:buNone/>
+              <a:tabLst>
+                <a:tab algn="l" pos="0"/>
+              </a:tabLst>
               <a:defRPr b="0" lang="ru-RU" sz="1400" strike="noStrike" u="none">
                 <a:solidFill>
                   <a:srgbClr val="000000"/>
@@ -1088,7 +1160,13 @@
           </a:lstStyle>
           <a:p>
             <a:pPr indent="0">
+              <a:lnSpc>
+                <a:spcPct val="100000"/>
+              </a:lnSpc>
               <a:buNone/>
+              <a:tabLst>
+                <a:tab algn="l" pos="0"/>
+              </a:tabLst>
             </a:pPr>
             <a:r>
               <a:rPr b="0" lang="ru-RU" sz="1400" strike="noStrike" u="none">
@@ -1173,8 +1251,8 @@
         </p:nvSpPr>
         <p:spPr>
           <a:xfrm>
-            <a:off x="504000" y="180000"/>
-            <a:ext cx="9070920" cy="1251000"/>
+            <a:off x="504000" y="361440"/>
+            <a:ext cx="9070200" cy="1341000"/>
           </a:xfrm>
           <a:prstGeom prst="rect">
             <a:avLst/>
@@ -1232,8 +1310,8 @@
         </p:nvSpPr>
         <p:spPr>
           <a:xfrm>
-            <a:off x="504000" y="1325880"/>
-            <a:ext cx="9070920" cy="3288960"/>
+            <a:off x="504000" y="1800000"/>
+            <a:ext cx="9070200" cy="3289680"/>
           </a:xfrm>
           <a:prstGeom prst="rect">
             <a:avLst/>
@@ -1321,8 +1399,8 @@
         </p:nvSpPr>
         <p:spPr>
           <a:xfrm>
-            <a:off x="504000" y="385920"/>
-            <a:ext cx="9070920" cy="625680"/>
+            <a:off x="504000" y="385200"/>
+            <a:ext cx="9070200" cy="626400"/>
           </a:xfrm>
           <a:prstGeom prst="rect">
             <a:avLst/>
@@ -1381,7 +1459,7 @@
         <p:spPr>
           <a:xfrm>
             <a:off x="504000" y="1326600"/>
-            <a:ext cx="4535640" cy="4073400"/>
+            <a:ext cx="4534920" cy="4072680"/>
           </a:xfrm>
           <a:prstGeom prst="rect">
             <a:avLst/>
@@ -1580,13 +1658,13 @@
         </p:nvPicPr>
         <p:blipFill>
           <a:blip r:embed="rId1"/>
-          <a:srcRect l="0" t="8996" r="0" b="11192"/>
+          <a:srcRect l="0" t="8995" r="0" b="11191"/>
           <a:stretch/>
         </p:blipFill>
         <p:spPr>
           <a:xfrm>
             <a:off x="5029200" y="1440000"/>
-            <a:ext cx="4510800" cy="3600000"/>
+            <a:ext cx="4510080" cy="3599280"/>
           </a:xfrm>
           <a:prstGeom prst="rect">
             <a:avLst/>
@@ -1639,8 +1717,8 @@
         </p:nvSpPr>
         <p:spPr>
           <a:xfrm>
-            <a:off x="504000" y="385920"/>
-            <a:ext cx="9070920" cy="625680"/>
+            <a:off x="504000" y="362880"/>
+            <a:ext cx="9070200" cy="671040"/>
           </a:xfrm>
           <a:prstGeom prst="rect">
             <a:avLst/>
@@ -1673,7 +1751,7 @@
                 <a:uFillTx/>
                 <a:latin typeface="Arial"/>
               </a:rPr>
-              <a:t>Глобальная идентичность</a:t>
+              <a:t>Глобальные перемены</a:t>
             </a:r>
             <a:endParaRPr b="0" lang="ru-RU" sz="4400" strike="noStrike" u="none">
               <a:solidFill>
@@ -1699,7 +1777,7 @@
         <p:spPr>
           <a:xfrm>
             <a:off x="5039640" y="1326600"/>
-            <a:ext cx="4535640" cy="3288240"/>
+            <a:ext cx="4534920" cy="4073040"/>
           </a:xfrm>
           <a:prstGeom prst="rect">
             <a:avLst/>
@@ -1710,7 +1788,7 @@
           </a:ln>
         </p:spPr>
         <p:txBody>
-          <a:bodyPr lIns="0" rIns="0" tIns="0" bIns="0" anchor="t">
+          <a:bodyPr lIns="0" rIns="0" tIns="0" bIns="0" anchor="ctr">
             <a:normAutofit/>
           </a:bodyPr>
           <a:p>
@@ -1864,8 +1942,102 @@
               <a:latin typeface="Arial"/>
             </a:endParaRPr>
           </a:p>
+          <a:p>
+            <a:pPr marL="432000" indent="-324000">
+              <a:lnSpc>
+                <a:spcPct val="100000"/>
+              </a:lnSpc>
+              <a:spcBef>
+                <a:spcPts val="1417"/>
+              </a:spcBef>
+              <a:buClr>
+                <a:srgbClr val="000000"/>
+              </a:buClr>
+              <a:buSzPct val="45000"/>
+              <a:buFont typeface="Wingdings" charset="2"/>
+              <a:buChar char=""/>
+            </a:pPr>
+            <a:r>
+              <a:rPr b="0" lang="ru-RU" sz="2800" strike="noStrike" u="none">
+                <a:solidFill>
+                  <a:srgbClr val="000000"/>
+                </a:solidFill>
+                <a:effectLst/>
+                <a:uFillTx/>
+                <a:latin typeface="Arial"/>
+              </a:rPr>
+              <a:t>Непрерывное обучение</a:t>
+            </a:r>
+            <a:endParaRPr b="0" lang="ru-RU" sz="2800" strike="noStrike" u="none">
+              <a:solidFill>
+                <a:srgbClr val="000000"/>
+              </a:solidFill>
+              <a:effectLst/>
+              <a:uFillTx/>
+              <a:latin typeface="Arial"/>
+            </a:endParaRPr>
+          </a:p>
+          <a:p>
+            <a:pPr marL="432000" indent="-324000">
+              <a:lnSpc>
+                <a:spcPct val="100000"/>
+              </a:lnSpc>
+              <a:spcBef>
+                <a:spcPts val="1417"/>
+              </a:spcBef>
+              <a:buClr>
+                <a:srgbClr val="000000"/>
+              </a:buClr>
+              <a:buSzPct val="45000"/>
+              <a:buFont typeface="Wingdings" charset="2"/>
+              <a:buChar char=""/>
+            </a:pPr>
+            <a:r>
+              <a:rPr b="0" lang="ru-RU" sz="2800" strike="noStrike" u="none">
+                <a:solidFill>
+                  <a:srgbClr val="000000"/>
+                </a:solidFill>
+                <a:effectLst/>
+                <a:uFillTx/>
+                <a:latin typeface="Arial"/>
+              </a:rPr>
+              <a:t>Открытость</a:t>
+            </a:r>
+            <a:endParaRPr b="0" lang="ru-RU" sz="2800" strike="noStrike" u="none">
+              <a:solidFill>
+                <a:srgbClr val="000000"/>
+              </a:solidFill>
+              <a:effectLst/>
+              <a:uFillTx/>
+              <a:latin typeface="Arial"/>
+            </a:endParaRPr>
+          </a:p>
         </p:txBody>
       </p:sp>
+      <p:pic>
+        <p:nvPicPr>
+          <p:cNvPr id="19" name="" descr=""/>
+          <p:cNvPicPr/>
+          <p:nvPr/>
+        </p:nvPicPr>
+        <p:blipFill>
+          <a:blip r:embed="rId1"/>
+          <a:stretch/>
+        </p:blipFill>
+        <p:spPr>
+          <a:xfrm>
+            <a:off x="180000" y="1987560"/>
+            <a:ext cx="4773600" cy="2872080"/>
+          </a:xfrm>
+          <a:prstGeom prst="rect">
+            <a:avLst/>
+          </a:prstGeom>
+          <a:noFill/>
+          <a:ln w="0">
+            <a:noFill/>
+          </a:ln>
+        </p:spPr>
+      </p:pic>
     </p:spTree>
   </p:cSld>
   <mc:AlternateContent>
@@ -1898,7 +2070,7 @@
       </p:grpSpPr>
       <p:sp>
         <p:nvSpPr>
-          <p:cNvPr id="19" name="PlaceHolder 1"/>
+          <p:cNvPr id="20" name="PlaceHolder 1"/>
           <p:cNvSpPr>
             <a:spLocks noGrp="1"/>
           </p:cNvSpPr>
@@ -1908,8 +2080,8 @@
         </p:nvSpPr>
         <p:spPr>
           <a:xfrm>
-            <a:off x="504000" y="385920"/>
-            <a:ext cx="9070920" cy="625680"/>
+            <a:off x="504000" y="385200"/>
+            <a:ext cx="9070200" cy="626400"/>
           </a:xfrm>
           <a:prstGeom prst="rect">
             <a:avLst/>
@@ -1957,7 +2129,7 @@
       </p:sp>
       <p:sp>
         <p:nvSpPr>
-          <p:cNvPr id="20" name="PlaceHolder 2"/>
+          <p:cNvPr id="21" name="PlaceHolder 2"/>
           <p:cNvSpPr>
             <a:spLocks noGrp="1"/>
           </p:cNvSpPr>
@@ -1968,7 +2140,7 @@
         <p:spPr>
           <a:xfrm>
             <a:off x="504000" y="1080000"/>
-            <a:ext cx="4535640" cy="4319640"/>
+            <a:ext cx="4534920" cy="4318920"/>
           </a:xfrm>
           <a:prstGeom prst="rect">
             <a:avLst/>
@@ -2126,7 +2298,7 @@
       </p:sp>
       <p:pic>
         <p:nvPicPr>
-          <p:cNvPr id="21" name="" descr=""/>
+          <p:cNvPr id="22" name="" descr=""/>
           <p:cNvPicPr/>
           <p:nvPr/>
         </p:nvPicPr>
@@ -2137,7 +2309,7 @@
         <p:spPr>
           <a:xfrm>
             <a:off x="5451120" y="1620000"/>
-            <a:ext cx="4350960" cy="2159640"/>
+            <a:ext cx="4350240" cy="2158920"/>
           </a:xfrm>
           <a:prstGeom prst="rect">
             <a:avLst/>
@@ -2180,7 +2352,7 @@
       </p:grpSpPr>
       <p:sp>
         <p:nvSpPr>
-          <p:cNvPr id="22" name="PlaceHolder 1"/>
+          <p:cNvPr id="23" name="PlaceHolder 1"/>
           <p:cNvSpPr>
             <a:spLocks noGrp="1"/>
           </p:cNvSpPr>
@@ -2190,8 +2362,8 @@
         </p:nvSpPr>
         <p:spPr>
           <a:xfrm>
-            <a:off x="504000" y="385920"/>
-            <a:ext cx="9070920" cy="625320"/>
+            <a:off x="504000" y="362880"/>
+            <a:ext cx="9070200" cy="671040"/>
           </a:xfrm>
           <a:prstGeom prst="rect">
             <a:avLst/>
@@ -2207,7 +2379,13 @@
           </a:bodyPr>
           <a:p>
             <a:pPr indent="0" algn="ctr">
+              <a:lnSpc>
+                <a:spcPct val="100000"/>
+              </a:lnSpc>
               <a:buNone/>
+              <a:tabLst>
+                <a:tab algn="l" pos="0"/>
+              </a:tabLst>
             </a:pPr>
             <a:r>
               <a:rPr b="0" lang="ru-RU" sz="4400" strike="noStrike" u="none">
@@ -2233,18 +2411,14 @@
       </p:sp>
       <p:sp>
         <p:nvSpPr>
-          <p:cNvPr id="23" name="PlaceHolder 2"/>
-          <p:cNvSpPr>
-            <a:spLocks noGrp="1"/>
-          </p:cNvSpPr>
-          <p:nvPr>
-            <p:ph/>
-          </p:nvPr>
+          <p:cNvPr id="24" name="PlaceHolder 3"/>
+          <p:cNvSpPr/>
+          <p:nvPr/>
         </p:nvSpPr>
         <p:spPr>
           <a:xfrm>
-            <a:off x="504000" y="1326600"/>
-            <a:ext cx="9071640" cy="3288240"/>
+            <a:off x="5040000" y="1081080"/>
+            <a:ext cx="4680000" cy="4318920"/>
           </a:xfrm>
           <a:prstGeom prst="rect">
             <a:avLst/>
@@ -2254,17 +2428,147 @@
             <a:noFill/>
           </a:ln>
         </p:spPr>
+        <p:style>
+          <a:lnRef idx="0"/>
+          <a:fillRef idx="0"/>
+          <a:effectRef idx="0"/>
+          <a:fontRef idx="minor"/>
+        </p:style>
         <p:txBody>
-          <a:bodyPr lIns="0" rIns="0" tIns="0" bIns="0" anchor="t">
+          <a:bodyPr lIns="0" rIns="0" tIns="0" bIns="0" anchor="ctr">
             <a:normAutofit/>
           </a:bodyPr>
           <a:p>
-            <a:pPr indent="0">
+            <a:pPr marL="432000" indent="-324000">
+              <a:lnSpc>
+                <a:spcPct val="100000"/>
+              </a:lnSpc>
               <a:spcBef>
                 <a:spcPts val="1417"/>
               </a:spcBef>
-              <a:buNone/>
-            </a:pPr>
+              <a:buClr>
+                <a:srgbClr val="000000"/>
+              </a:buClr>
+              <a:buSzPct val="45000"/>
+              <a:buFont typeface="Wingdings" charset="2"/>
+              <a:buChar char=""/>
+            </a:pPr>
+            <a:r>
+              <a:rPr b="0" lang="ru-RU" sz="3200" strike="noStrike" u="none">
+                <a:solidFill>
+                  <a:srgbClr val="000000"/>
+                </a:solidFill>
+                <a:effectLst/>
+                <a:uFillTx/>
+                <a:latin typeface="Arial"/>
+              </a:rPr>
+              <a:t>Опыт &gt; вещи</a:t>
+            </a:r>
+            <a:endParaRPr b="0" lang="ru-RU" sz="3200" strike="noStrike" u="none">
+              <a:solidFill>
+                <a:srgbClr val="000000"/>
+              </a:solidFill>
+              <a:effectLst/>
+              <a:uFillTx/>
+              <a:latin typeface="Arial"/>
+            </a:endParaRPr>
+          </a:p>
+          <a:p>
+            <a:pPr marL="432000" indent="-324000">
+              <a:lnSpc>
+                <a:spcPct val="100000"/>
+              </a:lnSpc>
+              <a:spcBef>
+                <a:spcPts val="1417"/>
+              </a:spcBef>
+              <a:buClr>
+                <a:srgbClr val="000000"/>
+              </a:buClr>
+              <a:buSzPct val="45000"/>
+              <a:buFont typeface="Wingdings" charset="2"/>
+              <a:buChar char=""/>
+            </a:pPr>
+            <a:r>
+              <a:rPr b="0" lang="ru-RU" sz="3200" strike="noStrike" u="none">
+                <a:solidFill>
+                  <a:srgbClr val="000000"/>
+                </a:solidFill>
+                <a:effectLst/>
+                <a:uFillTx/>
+                <a:latin typeface="Arial"/>
+              </a:rPr>
+              <a:t>Следит за репутацией </a:t>
+            </a:r>
+            <a:endParaRPr b="0" lang="ru-RU" sz="3200" strike="noStrike" u="none">
+              <a:solidFill>
+                <a:srgbClr val="000000"/>
+              </a:solidFill>
+              <a:effectLst/>
+              <a:uFillTx/>
+              <a:latin typeface="Arial"/>
+            </a:endParaRPr>
+          </a:p>
+          <a:p>
+            <a:pPr marL="432000" indent="-324000">
+              <a:lnSpc>
+                <a:spcPct val="100000"/>
+              </a:lnSpc>
+              <a:spcBef>
+                <a:spcPts val="1417"/>
+              </a:spcBef>
+              <a:buClr>
+                <a:srgbClr val="000000"/>
+              </a:buClr>
+              <a:buSzPct val="45000"/>
+              <a:buFont typeface="Wingdings" charset="2"/>
+              <a:buChar char=""/>
+            </a:pPr>
+            <a:r>
+              <a:rPr b="0" lang="ru-RU" sz="3200" strike="noStrike" u="none">
+                <a:solidFill>
+                  <a:srgbClr val="000000"/>
+                </a:solidFill>
+                <a:effectLst/>
+                <a:uFillTx/>
+                <a:latin typeface="Arial"/>
+              </a:rPr>
+              <a:t>Баланс работа/жизнь</a:t>
+            </a:r>
+            <a:endParaRPr b="0" lang="ru-RU" sz="3200" strike="noStrike" u="none">
+              <a:solidFill>
+                <a:srgbClr val="000000"/>
+              </a:solidFill>
+              <a:effectLst/>
+              <a:uFillTx/>
+              <a:latin typeface="Arial"/>
+            </a:endParaRPr>
+          </a:p>
+          <a:p>
+            <a:pPr marL="432000" indent="-324000">
+              <a:lnSpc>
+                <a:spcPct val="100000"/>
+              </a:lnSpc>
+              <a:spcBef>
+                <a:spcPts val="1417"/>
+              </a:spcBef>
+              <a:buClr>
+                <a:srgbClr val="000000"/>
+              </a:buClr>
+              <a:buSzPct val="45000"/>
+              <a:buFont typeface="Wingdings" charset="2"/>
+              <a:buChar char=""/>
+            </a:pPr>
+            <a:r>
+              <a:rPr b="0" lang="ru-RU" sz="3200" strike="noStrike" u="none">
+                <a:solidFill>
+                  <a:srgbClr val="000000"/>
+                </a:solidFill>
+                <a:effectLst/>
+                <a:uFillTx/>
+                <a:latin typeface="Arial"/>
+              </a:rPr>
+              <a:t>Высокая даптивность</a:t>
+            </a:r>
             <a:endParaRPr b="0" lang="ru-RU" sz="3200" strike="noStrike" u="none">
               <a:solidFill>
                 <a:srgbClr val="000000"/>
@@ -2276,6 +2580,30 @@
           </a:p>
         </p:txBody>
       </p:sp>
+      <p:pic>
+        <p:nvPicPr>
+          <p:cNvPr id="25" name="" descr=""/>
+          <p:cNvPicPr/>
+          <p:nvPr/>
+        </p:nvPicPr>
+        <p:blipFill>
+          <a:blip r:embed="rId1"/>
+          <a:stretch/>
+        </p:blipFill>
+        <p:spPr>
+          <a:xfrm>
+            <a:off x="360360" y="1080360"/>
+            <a:ext cx="4319640" cy="4319640"/>
+          </a:xfrm>
+          <a:prstGeom prst="rect">
+            <a:avLst/>
+          </a:prstGeom>
+          <a:noFill/>
+          <a:ln w="0">
+            <a:noFill/>
+          </a:ln>
+        </p:spPr>
+      </p:pic>
     </p:spTree>
   </p:cSld>
   <mc:AlternateContent>
@@ -2308,7 +2636,7 @@
       </p:grpSpPr>
       <p:sp>
         <p:nvSpPr>
-          <p:cNvPr id="24" name="PlaceHolder 1"/>
+          <p:cNvPr id="26" name="PlaceHolder 1"/>
           <p:cNvSpPr>
             <a:spLocks noGrp="1"/>
           </p:cNvSpPr>
@@ -2318,8 +2646,8 @@
         </p:nvSpPr>
         <p:spPr>
           <a:xfrm>
-            <a:off x="504000" y="385920"/>
-            <a:ext cx="9070920" cy="625320"/>
+            <a:off x="504000" y="385200"/>
+            <a:ext cx="9070200" cy="626040"/>
           </a:xfrm>
           <a:prstGeom prst="rect">
             <a:avLst/>
@@ -2335,7 +2663,13 @@
           </a:bodyPr>
           <a:p>
             <a:pPr indent="0" algn="ctr">
+              <a:lnSpc>
+                <a:spcPct val="100000"/>
+              </a:lnSpc>
               <a:buNone/>
+              <a:tabLst>
+                <a:tab algn="l" pos="0"/>
+              </a:tabLst>
             </a:pPr>
             <a:r>
               <a:rPr b="0" lang="ru-RU" sz="4400" strike="noStrike" u="none">
@@ -2361,7 +2695,7 @@
       </p:sp>
       <p:sp>
         <p:nvSpPr>
-          <p:cNvPr id="25" name="PlaceHolder 2"/>
+          <p:cNvPr id="27" name="PlaceHolder 2"/>
           <p:cNvSpPr>
             <a:spLocks noGrp="1"/>
           </p:cNvSpPr>
@@ -2372,7 +2706,7 @@
         <p:spPr>
           <a:xfrm>
             <a:off x="504000" y="1326600"/>
-            <a:ext cx="9071640" cy="3288240"/>
+            <a:ext cx="9070920" cy="3287520"/>
           </a:xfrm>
           <a:prstGeom prst="rect">
             <a:avLst/>
@@ -2393,7 +2727,7 @@
               </a:spcBef>
               <a:buNone/>
             </a:pPr>
-            <a:endParaRPr b="0" lang="ru-RU" sz="3200" strike="noStrike" u="none">
+            <a:endParaRPr b="0" lang="ru-RU" sz="1800" strike="noStrike" u="none">
               <a:solidFill>
                 <a:srgbClr val="000000"/>
               </a:solidFill>
